--- a/Intelligent_Navigation_Decision_Support_System.pptx
+++ b/Intelligent_Navigation_Decision_Support_System.pptx
@@ -4,6 +4,9 @@
   <p:sldMasterIdLst>
     <p:sldMasterId id="2147483648" r:id="rId1"/>
   </p:sldMasterIdLst>
+  <p:notesMasterIdLst>
+    <p:notesMasterId r:id="rId19"/>
+  </p:notesMasterIdLst>
   <p:sldIdLst>
     <p:sldId id="256" r:id="rId2"/>
     <p:sldId id="257" r:id="rId3"/>
@@ -23,9 +26,6 @@
     <p:sldId id="271" r:id="rId17"/>
     <p:sldId id="272" r:id="rId18"/>
   </p:sldIdLst>
-  <p:notesMasterIdLst>
-    <p:notesMasterId r:id="rId19"/>
-  </p:notesMasterIdLst>
   <p:sldSz cx="12192000" cy="6858000"/>
   <p:notesSz cx="6858000" cy="12192000"/>
   <p:defaultTextStyle>
@@ -120,6 +120,11 @@
       </a:defRPr>
     </a:lvl9pPr>
   </p:defaultTextStyle>
+  <p:extLst>
+    <p:ext uri="{EFAFB233-063F-42B5-8137-9DF3F51BA10A}">
+      <p15:sldGuideLst xmlns:p15="http://schemas.microsoft.com/office/powerpoint/2012/main"/>
+    </p:ext>
+  </p:extLst>
 </p:presentation>
 </file>
 
@@ -145,234 +150,10 @@
           <a:chExt cx="0" cy="0"/>
         </a:xfrm>
       </p:grpSpPr>
-      <p:sp>
-        <p:nvSpPr>
-          <p:cNvPr id="2" name="Header Placeholder 1"/>
-          <p:cNvSpPr>
-            <a:spLocks noGrp="1"/>
-          </p:cNvSpPr>
-          <p:nvPr>
-            <p:ph type="hdr" sz="quarter"/>
-          </p:nvPr>
-        </p:nvSpPr>
-        <p:spPr>
-          <a:xfrm>
-            <a:off x="0" y="0"/>
-            <a:ext cx="2971800" cy="458788"/>
-          </a:xfrm>
-          <a:prstGeom prst="rect">
-            <a:avLst/>
-          </a:prstGeom>
-        </p:spPr>
-        <p:txBody>
-          <a:bodyPr vert="horz" lIns="91440" tIns="45720" rIns="91440" bIns="45720" rtlCol="0"/>
-          <a:lstStyle>
-            <a:lvl1pPr algn="l">
-              <a:defRPr sz="1200"/>
-            </a:lvl1pPr>
-          </a:lstStyle>
-          <a:p>
-            <a:endParaRPr lang="en-US"/>
-          </a:p>
-        </p:txBody>
-      </p:sp>
-      <p:sp>
-        <p:nvSpPr>
-          <p:cNvPr id="3" name="Date Placeholder 2"/>
-          <p:cNvSpPr>
-            <a:spLocks noGrp="1"/>
-          </p:cNvSpPr>
-          <p:nvPr>
-            <p:ph type="dt" idx="1"/>
-          </p:nvPr>
-        </p:nvSpPr>
-        <p:spPr>
-          <a:xfrm>
-            <a:off x="3884613" y="0"/>
-            <a:ext cx="2971800" cy="458788"/>
-          </a:xfrm>
-          <a:prstGeom prst="rect">
-            <a:avLst/>
-          </a:prstGeom>
-        </p:spPr>
-        <p:txBody>
-          <a:bodyPr vert="horz" lIns="91440" tIns="45720" rIns="91440" bIns="45720" rtlCol="0"/>
-          <a:lstStyle>
-            <a:lvl1pPr algn="r">
-              <a:defRPr sz="1200"/>
-            </a:lvl1pPr>
-          </a:lstStyle>
-          <a:p>
-            <a:fld id="{5282F153-3F37-0F45-9E97-73ACFA13230C}" type="datetimeFigureOut">
-              <a:rPr lang="en-US"/>
-              <a:t>7/23/19</a:t>
-            </a:fld>
-            <a:endParaRPr lang="en-US"/>
-          </a:p>
-        </p:txBody>
-      </p:sp>
-      <p:sp>
-        <p:nvSpPr>
-          <p:cNvPr id="4" name="Slide Image Placeholder 3"/>
-          <p:cNvSpPr>
-            <a:spLocks noGrp="1" noRot="1" noChangeAspect="1"/>
-          </p:cNvSpPr>
-          <p:nvPr>
-            <p:ph type="sldImg" idx="2"/>
-          </p:nvPr>
-        </p:nvSpPr>
-        <p:spPr>
-          <a:xfrm>
-            <a:off x="685800" y="1143000"/>
-            <a:ext cx="5486400" cy="3086100"/>
-          </a:xfrm>
-          <a:prstGeom prst="rect">
-            <a:avLst/>
-          </a:prstGeom>
-          <a:noFill/>
-          <a:ln w="12700">
-            <a:solidFill>
-              <a:prstClr val="black"/>
-            </a:solidFill>
-          </a:ln>
-        </p:spPr>
-        <p:txBody>
-          <a:bodyPr vert="horz" lIns="91440" tIns="45720" rIns="91440" bIns="45720" rtlCol="0" anchor="ctr"/>
-          <a:lstStyle/>
-          <a:p>
-            <a:endParaRPr lang="en-US"/>
-          </a:p>
-        </p:txBody>
-      </p:sp>
-      <p:sp>
-        <p:nvSpPr>
-          <p:cNvPr id="5" name="Notes Placeholder 4"/>
-          <p:cNvSpPr>
-            <a:spLocks noGrp="1"/>
-          </p:cNvSpPr>
-          <p:nvPr>
-            <p:ph type="body" sz="quarter" idx="3"/>
-          </p:nvPr>
-        </p:nvSpPr>
-        <p:spPr>
-          <a:xfrm>
-            <a:off x="685800" y="4400550"/>
-            <a:ext cx="5486400" cy="3600450"/>
-          </a:xfrm>
-          <a:prstGeom prst="rect">
-            <a:avLst/>
-          </a:prstGeom>
-        </p:spPr>
-        <p:txBody>
-          <a:bodyPr vert="horz" lIns="91440" tIns="45720" rIns="91440" bIns="45720" rtlCol="0"/>
-          <a:lstStyle/>
-          <a:p>
-            <a:pPr lvl="0"/>
-            <a:r>
-              <a:rPr lang="en-US"/>
-              <a:t>Click to edit Master text styles</a:t>
-            </a:r>
-          </a:p>
-          <a:p>
-            <a:pPr lvl="1"/>
-            <a:r>
-              <a:rPr lang="en-US"/>
-              <a:t>Second level</a:t>
-            </a:r>
-          </a:p>
-          <a:p>
-            <a:pPr lvl="2"/>
-            <a:r>
-              <a:rPr lang="en-US"/>
-              <a:t>Third level</a:t>
-            </a:r>
-          </a:p>
-          <a:p>
-            <a:pPr lvl="3"/>
-            <a:r>
-              <a:rPr lang="en-US"/>
-              <a:t>Fourth level</a:t>
-            </a:r>
-          </a:p>
-          <a:p>
-            <a:pPr lvl="4"/>
-            <a:r>
-              <a:rPr lang="en-US"/>
-              <a:t>Fifth level</a:t>
-            </a:r>
-          </a:p>
-        </p:txBody>
-      </p:sp>
-      <p:sp>
-        <p:nvSpPr>
-          <p:cNvPr id="6" name="Footer Placeholder 5"/>
-          <p:cNvSpPr>
-            <a:spLocks noGrp="1"/>
-          </p:cNvSpPr>
-          <p:nvPr>
-            <p:ph type="ftr" sz="quarter" idx="4"/>
-          </p:nvPr>
-        </p:nvSpPr>
-        <p:spPr>
-          <a:xfrm>
-            <a:off x="0" y="8685213"/>
-            <a:ext cx="2971800" cy="458787"/>
-          </a:xfrm>
-          <a:prstGeom prst="rect">
-            <a:avLst/>
-          </a:prstGeom>
-        </p:spPr>
-        <p:txBody>
-          <a:bodyPr vert="horz" lIns="91440" tIns="45720" rIns="91440" bIns="45720" rtlCol="0" anchor="b"/>
-          <a:lstStyle>
-            <a:lvl1pPr algn="l">
-              <a:defRPr sz="1200"/>
-            </a:lvl1pPr>
-          </a:lstStyle>
-          <a:p>
-            <a:endParaRPr lang="en-US"/>
-          </a:p>
-        </p:txBody>
-      </p:sp>
-      <p:sp>
-        <p:nvSpPr>
-          <p:cNvPr id="7" name="Slide Number Placeholder 6"/>
-          <p:cNvSpPr>
-            <a:spLocks noGrp="1"/>
-          </p:cNvSpPr>
-          <p:nvPr>
-            <p:ph type="sldNum" sz="quarter" idx="5"/>
-          </p:nvPr>
-        </p:nvSpPr>
-        <p:spPr>
-          <a:xfrm>
-            <a:off x="3884613" y="8685213"/>
-            <a:ext cx="2971800" cy="458787"/>
-          </a:xfrm>
-          <a:prstGeom prst="rect">
-            <a:avLst/>
-          </a:prstGeom>
-        </p:spPr>
-        <p:txBody>
-          <a:bodyPr vert="horz" lIns="91440" tIns="45720" rIns="91440" bIns="45720" rtlCol="0" anchor="b"/>
-          <a:lstStyle>
-            <a:lvl1pPr algn="r">
-              <a:defRPr sz="1200"/>
-            </a:lvl1pPr>
-          </a:lstStyle>
-          <a:p>
-            <a:fld id="{CE5E9CC1-C706-0F49-92D6-E571CC5EEA8F}" type="slidenum">
-              <a:rPr lang="en-US"/>
-              <a:t>‹#›</a:t>
-            </a:fld>
-            <a:endParaRPr lang="en-US"/>
-          </a:p>
-        </p:txBody>
-      </p:sp>
     </p:spTree>
     <p:extLst>
       <p:ext uri="{BB962C8B-B14F-4D97-AF65-F5344CB8AC3E}">
-        <p14:creationId xmlns:p14="http://schemas.microsoft.com/office/powerpoint/2010/main" val="1024086991"/>
+        <p14:creationId xmlns:p14="http://schemas.microsoft.com/office/powerpoint/2010/main" val="2448493769"/>
       </p:ext>
     </p:extLst>
   </p:cSld>
@@ -516,10 +297,6 @@
           <a:bodyPr/>
           <a:lstStyle/>
           <a:p>
-            <a:r>
-              <a:rPr lang="en-US" dirty="0"/>
-              <a:t/>
-            </a:r>
             <a:endParaRPr lang="en-US" dirty="0"/>
           </a:p>
         </p:txBody>
@@ -604,10 +381,6 @@
           <a:bodyPr/>
           <a:lstStyle/>
           <a:p>
-            <a:r>
-              <a:rPr lang="en-US" dirty="0"/>
-              <a:t/>
-            </a:r>
             <a:endParaRPr lang="en-US" dirty="0"/>
           </a:p>
         </p:txBody>
@@ -692,10 +465,6 @@
           <a:bodyPr/>
           <a:lstStyle/>
           <a:p>
-            <a:r>
-              <a:rPr lang="en-US" dirty="0"/>
-              <a:t/>
-            </a:r>
             <a:endParaRPr lang="en-US" dirty="0"/>
           </a:p>
         </p:txBody>
@@ -780,10 +549,6 @@
           <a:bodyPr/>
           <a:lstStyle/>
           <a:p>
-            <a:r>
-              <a:rPr lang="en-US" dirty="0"/>
-              <a:t/>
-            </a:r>
             <a:endParaRPr lang="en-US" dirty="0"/>
           </a:p>
         </p:txBody>
@@ -868,10 +633,6 @@
           <a:bodyPr/>
           <a:lstStyle/>
           <a:p>
-            <a:r>
-              <a:rPr lang="en-US" dirty="0"/>
-              <a:t/>
-            </a:r>
             <a:endParaRPr lang="en-US" dirty="0"/>
           </a:p>
         </p:txBody>
@@ -956,10 +717,6 @@
           <a:bodyPr/>
           <a:lstStyle/>
           <a:p>
-            <a:r>
-              <a:rPr lang="en-US" dirty="0"/>
-              <a:t/>
-            </a:r>
             <a:endParaRPr lang="en-US" dirty="0"/>
           </a:p>
         </p:txBody>
@@ -1044,10 +801,6 @@
           <a:bodyPr/>
           <a:lstStyle/>
           <a:p>
-            <a:r>
-              <a:rPr lang="en-US" dirty="0"/>
-              <a:t/>
-            </a:r>
             <a:endParaRPr lang="en-US" dirty="0"/>
           </a:p>
         </p:txBody>
@@ -1132,10 +885,6 @@
           <a:bodyPr/>
           <a:lstStyle/>
           <a:p>
-            <a:r>
-              <a:rPr lang="en-US" dirty="0"/>
-              <a:t/>
-            </a:r>
             <a:endParaRPr lang="en-US" dirty="0"/>
           </a:p>
         </p:txBody>
@@ -1220,10 +969,6 @@
           <a:bodyPr/>
           <a:lstStyle/>
           <a:p>
-            <a:r>
-              <a:rPr lang="en-US" dirty="0"/>
-              <a:t/>
-            </a:r>
             <a:endParaRPr lang="en-US" dirty="0"/>
           </a:p>
         </p:txBody>
@@ -1308,10 +1053,6 @@
           <a:bodyPr/>
           <a:lstStyle/>
           <a:p>
-            <a:r>
-              <a:rPr lang="en-US" dirty="0"/>
-              <a:t/>
-            </a:r>
             <a:endParaRPr lang="en-US" dirty="0"/>
           </a:p>
         </p:txBody>
@@ -1396,10 +1137,6 @@
           <a:bodyPr/>
           <a:lstStyle/>
           <a:p>
-            <a:r>
-              <a:rPr lang="en-US" dirty="0"/>
-              <a:t/>
-            </a:r>
             <a:endParaRPr lang="en-US" dirty="0"/>
           </a:p>
         </p:txBody>
@@ -1484,10 +1221,6 @@
           <a:bodyPr/>
           <a:lstStyle/>
           <a:p>
-            <a:r>
-              <a:rPr lang="en-US" dirty="0"/>
-              <a:t/>
-            </a:r>
             <a:endParaRPr lang="en-US" dirty="0"/>
           </a:p>
         </p:txBody>
@@ -1572,10 +1305,6 @@
           <a:bodyPr/>
           <a:lstStyle/>
           <a:p>
-            <a:r>
-              <a:rPr lang="en-US" dirty="0"/>
-              <a:t/>
-            </a:r>
             <a:endParaRPr lang="en-US" dirty="0"/>
           </a:p>
         </p:txBody>
@@ -1660,10 +1389,6 @@
           <a:bodyPr/>
           <a:lstStyle/>
           <a:p>
-            <a:r>
-              <a:rPr lang="en-US" dirty="0"/>
-              <a:t/>
-            </a:r>
             <a:endParaRPr lang="en-US" dirty="0"/>
           </a:p>
         </p:txBody>
@@ -1748,10 +1473,6 @@
           <a:bodyPr/>
           <a:lstStyle/>
           <a:p>
-            <a:r>
-              <a:rPr lang="en-US" dirty="0"/>
-              <a:t/>
-            </a:r>
             <a:endParaRPr lang="en-US" dirty="0"/>
           </a:p>
         </p:txBody>
@@ -1836,10 +1557,6 @@
           <a:bodyPr/>
           <a:lstStyle/>
           <a:p>
-            <a:r>
-              <a:rPr lang="en-US" dirty="0"/>
-              <a:t/>
-            </a:r>
             <a:endParaRPr lang="en-US" dirty="0"/>
           </a:p>
         </p:txBody>
@@ -1924,10 +1641,6 @@
           <a:bodyPr/>
           <a:lstStyle/>
           <a:p>
-            <a:r>
-              <a:rPr lang="en-US" dirty="0"/>
-              <a:t/>
-            </a:r>
             <a:endParaRPr lang="en-US" dirty="0"/>
           </a:p>
         </p:txBody>
@@ -2001,6 +1714,11 @@
 <file path=ppt/slideMasters/slideMaster1.xml><?xml version="1.0" encoding="utf-8"?>
 <p:sldMaster xmlns:a="http://schemas.openxmlformats.org/drawingml/2006/main" xmlns:r="http://schemas.openxmlformats.org/officeDocument/2006/relationships" xmlns:p="http://schemas.openxmlformats.org/presentationml/2006/main">
   <p:cSld>
+    <p:bg>
+      <p:bgRef idx="1001">
+        <a:schemeClr val="bg1"/>
+      </p:bgRef>
+    </p:bg>
     <p:spTree>
       <p:nvGrpSpPr>
         <p:cNvPr id="1" name=""/>
@@ -2283,6 +2001,7 @@
         <a:solidFill>
           <a:srgbClr val="0B1220"/>
         </a:solidFill>
+        <a:effectLst/>
       </p:bgPr>
     </p:bg>
     <p:spTree>
@@ -2569,26 +2288,6 @@
       </p:sp>
       <p:sp>
         <p:nvSpPr>
-          <p:cNvPr id="14" name="Shape 12"/>
-          <p:cNvSpPr/>
-          <p:nvPr/>
-        </p:nvSpPr>
-        <p:spPr>
-          <a:xfrm>
-            <a:off x="-1280160" y="4206240"/>
-            <a:ext cx="3657600" cy="3657600"/>
-          </a:xfrm>
-          <a:prstGeom prst="ellipse">
-            <a:avLst/>
-          </a:prstGeom>
-          <a:solidFill>
-            <a:srgbClr val="1C3157"/>
-          </a:solidFill>
-          <a:ln/>
-        </p:spPr>
-      </p:sp>
-      <p:sp>
-        <p:nvSpPr>
           <p:cNvPr id="15" name="Shape 13"/>
           <p:cNvSpPr/>
           <p:nvPr/>
@@ -2628,7 +2327,7 @@
           <a:bodyPr wrap="square" lIns="0" tIns="0" rIns="0" bIns="0" rtlCol="0" anchor="ctr"/>
           <a:lstStyle/>
           <a:p>
-            <a:pPr algn="ctr" indent="0" marL="0">
+            <a:pPr marL="0" indent="0" algn="ctr">
               <a:buNone/>
             </a:pPr>
             <a:r>
@@ -2667,11 +2366,11 @@
           <a:bodyPr wrap="square" lIns="0" tIns="0" rIns="0" bIns="0" rtlCol="0" anchor="ctr"/>
           <a:lstStyle/>
           <a:p>
-            <a:pPr algn="l" indent="0" marL="0">
-              <a:buNone/>
-            </a:pPr>
-            <a:r>
-              <a:rPr lang="en-US" sz="1200" b="1" spc="200" kern="0" dirty="0">
+            <a:pPr marL="0" indent="0" algn="l">
+              <a:buNone/>
+            </a:pPr>
+            <a:r>
+              <a:rPr lang="en-US" sz="1200" b="1" kern="0" spc="200" dirty="0">
                 <a:solidFill>
                   <a:srgbClr val="17C3D6"/>
                 </a:solidFill>
@@ -2706,7 +2405,7 @@
           <a:bodyPr wrap="square" lIns="0" tIns="0" rIns="0" bIns="0" rtlCol="0" anchor="ctr"/>
           <a:lstStyle/>
           <a:p>
-            <a:pPr algn="l" indent="0" marL="0">
+            <a:pPr marL="0" indent="0" algn="l">
               <a:lnSpc>
                 <a:spcPct val="105000"/>
               </a:lnSpc>
@@ -2726,7 +2425,7 @@
             <a:endParaRPr lang="en-US" sz="4000" dirty="0"/>
           </a:p>
           <a:p>
-            <a:pPr algn="l" indent="0" marL="0">
+            <a:pPr marL="0" indent="0" algn="l">
               <a:lnSpc>
                 <a:spcPct val="105000"/>
               </a:lnSpc>
@@ -2768,7 +2467,7 @@
           <a:bodyPr wrap="square" lIns="0" tIns="0" rIns="0" bIns="0" rtlCol="0" anchor="ctr"/>
           <a:lstStyle/>
           <a:p>
-            <a:pPr algn="l" indent="0" marL="0">
+            <a:pPr marL="0" indent="0" algn="l">
               <a:lnSpc>
                 <a:spcPct val="125000"/>
               </a:lnSpc>
@@ -2832,7 +2531,7 @@
           <a:bodyPr wrap="square" lIns="0" tIns="0" rIns="0" bIns="0" rtlCol="0" anchor="ctr"/>
           <a:lstStyle/>
           <a:p>
-            <a:pPr algn="ctr" indent="0" marL="0">
+            <a:pPr marL="0" indent="0" algn="ctr">
               <a:buNone/>
             </a:pPr>
             <a:r>
@@ -2917,7 +2616,7 @@
           <a:bodyPr wrap="square" lIns="0" tIns="0" rIns="0" bIns="0" rtlCol="0" anchor="ctr"/>
           <a:lstStyle/>
           <a:p>
-            <a:pPr algn="ctr" indent="0" marL="0">
+            <a:pPr marL="0" indent="0" algn="ctr">
               <a:buNone/>
             </a:pPr>
             <a:r>
@@ -3002,7 +2701,7 @@
           <a:bodyPr wrap="square" lIns="0" tIns="0" rIns="0" bIns="0" rtlCol="0" anchor="ctr"/>
           <a:lstStyle/>
           <a:p>
-            <a:pPr algn="ctr" indent="0" marL="0">
+            <a:pPr marL="0" indent="0" algn="ctr">
               <a:buNone/>
             </a:pPr>
             <a:r>
@@ -3087,7 +2786,7 @@
           <a:bodyPr wrap="square" lIns="0" tIns="0" rIns="0" bIns="0" rtlCol="0" anchor="ctr"/>
           <a:lstStyle/>
           <a:p>
-            <a:pPr algn="ctr" indent="0" marL="0">
+            <a:pPr marL="0" indent="0" algn="ctr">
               <a:buNone/>
             </a:pPr>
             <a:r>
@@ -3150,7 +2849,7 @@
           <a:bodyPr wrap="square" lIns="0" tIns="0" rIns="0" bIns="0" rtlCol="0" anchor="ctr"/>
           <a:lstStyle/>
           <a:p>
-            <a:pPr algn="l" indent="0" marL="0">
+            <a:pPr marL="0" indent="0" algn="l">
               <a:buNone/>
             </a:pPr>
             <a:r>
@@ -3184,6 +2883,7 @@
         <a:solidFill>
           <a:srgbClr val="FFFFFF"/>
         </a:solidFill>
+        <a:effectLst/>
       </p:bgPr>
     </p:bg>
     <p:spTree>
@@ -3221,11 +2921,11 @@
           <a:bodyPr wrap="square" lIns="0" tIns="0" rIns="0" bIns="0" rtlCol="0" anchor="ctr"/>
           <a:lstStyle/>
           <a:p>
-            <a:pPr algn="l" indent="0" marL="0">
-              <a:buNone/>
-            </a:pPr>
-            <a:r>
-              <a:rPr lang="en-US" sz="1100" b="1" spc="200" kern="0" dirty="0">
+            <a:pPr marL="0" indent="0" algn="l">
+              <a:buNone/>
+            </a:pPr>
+            <a:r>
+              <a:rPr lang="en-US" sz="1100" b="1" kern="0" spc="200" dirty="0">
                 <a:solidFill>
                   <a:srgbClr val="0E8FA0"/>
                 </a:solidFill>
@@ -3260,7 +2960,7 @@
           <a:bodyPr wrap="square" lIns="0" tIns="0" rIns="0" bIns="0" rtlCol="0" anchor="ctr"/>
           <a:lstStyle/>
           <a:p>
-            <a:pPr algn="l" indent="0" marL="0">
+            <a:pPr marL="0" indent="0" algn="l">
               <a:buNone/>
             </a:pPr>
             <a:r>
@@ -3375,7 +3075,7 @@
             <a:prstDash val="solid"/>
           </a:ln>
           <a:effectLst>
-            <a:outerShdw sx="100000" sy="100000" kx="0" ky="0" algn="bl" rotWithShape="0" blurRad="76200" dist="25400" dir="5400000">
+            <a:outerShdw blurRad="76200" dist="25400" dir="5400000" algn="bl" rotWithShape="0">
               <a:srgbClr val="0B1220">
                 <a:alpha val="18000"/>
               </a:srgbClr>
@@ -3404,7 +3104,7 @@
           <a:bodyPr wrap="square" lIns="0" tIns="0" rIns="0" bIns="0" rtlCol="0" anchor="ctr"/>
           <a:lstStyle/>
           <a:p>
-            <a:pPr indent="0" marL="0">
+            <a:pPr marL="0" indent="0">
               <a:buNone/>
             </a:pPr>
             <a:r>
@@ -3443,7 +3143,7 @@
           <a:bodyPr wrap="square" lIns="0" tIns="0" rIns="0" bIns="0" rtlCol="0" anchor="ctr"/>
           <a:lstStyle/>
           <a:p>
-            <a:pPr indent="0" marL="0">
+            <a:pPr marL="0" indent="0">
               <a:buNone/>
             </a:pPr>
             <a:r>
@@ -3482,7 +3182,7 @@
           <a:bodyPr wrap="square" lIns="0" tIns="0" rIns="0" bIns="0" rtlCol="0" anchor="ctr"/>
           <a:lstStyle/>
           <a:p>
-            <a:pPr indent="0" marL="0">
+            <a:pPr marL="0" indent="0">
               <a:lnSpc>
                 <a:spcPct val="105000"/>
               </a:lnSpc>
@@ -3577,7 +3277,7 @@
             <a:prstDash val="solid"/>
           </a:ln>
           <a:effectLst>
-            <a:outerShdw sx="100000" sy="100000" kx="0" ky="0" algn="bl" rotWithShape="0" blurRad="76200" dist="25400" dir="5400000">
+            <a:outerShdw blurRad="76200" dist="25400" dir="5400000" algn="bl" rotWithShape="0">
               <a:srgbClr val="0B1220">
                 <a:alpha val="18000"/>
               </a:srgbClr>
@@ -3606,7 +3306,7 @@
           <a:bodyPr wrap="square" lIns="0" tIns="0" rIns="0" bIns="0" rtlCol="0" anchor="ctr"/>
           <a:lstStyle/>
           <a:p>
-            <a:pPr indent="0" marL="0">
+            <a:pPr marL="0" indent="0">
               <a:buNone/>
             </a:pPr>
             <a:r>
@@ -3645,7 +3345,7 @@
           <a:bodyPr wrap="square" lIns="0" tIns="0" rIns="0" bIns="0" rtlCol="0" anchor="ctr"/>
           <a:lstStyle/>
           <a:p>
-            <a:pPr indent="0" marL="0">
+            <a:pPr marL="0" indent="0">
               <a:buNone/>
             </a:pPr>
             <a:r>
@@ -3684,7 +3384,7 @@
           <a:bodyPr wrap="square" lIns="0" tIns="0" rIns="0" bIns="0" rtlCol="0" anchor="ctr"/>
           <a:lstStyle/>
           <a:p>
-            <a:pPr indent="0" marL="0">
+            <a:pPr marL="0" indent="0">
               <a:lnSpc>
                 <a:spcPct val="105000"/>
               </a:lnSpc>
@@ -3779,7 +3479,7 @@
             <a:prstDash val="solid"/>
           </a:ln>
           <a:effectLst>
-            <a:outerShdw sx="100000" sy="100000" kx="0" ky="0" algn="bl" rotWithShape="0" blurRad="76200" dist="25400" dir="5400000">
+            <a:outerShdw blurRad="76200" dist="25400" dir="5400000" algn="bl" rotWithShape="0">
               <a:srgbClr val="0B1220">
                 <a:alpha val="18000"/>
               </a:srgbClr>
@@ -3808,7 +3508,7 @@
           <a:bodyPr wrap="square" lIns="0" tIns="0" rIns="0" bIns="0" rtlCol="0" anchor="ctr"/>
           <a:lstStyle/>
           <a:p>
-            <a:pPr indent="0" marL="0">
+            <a:pPr marL="0" indent="0">
               <a:buNone/>
             </a:pPr>
             <a:r>
@@ -3847,7 +3547,7 @@
           <a:bodyPr wrap="square" lIns="0" tIns="0" rIns="0" bIns="0" rtlCol="0" anchor="ctr"/>
           <a:lstStyle/>
           <a:p>
-            <a:pPr indent="0" marL="0">
+            <a:pPr marL="0" indent="0">
               <a:buNone/>
             </a:pPr>
             <a:r>
@@ -3886,7 +3586,7 @@
           <a:bodyPr wrap="square" lIns="0" tIns="0" rIns="0" bIns="0" rtlCol="0" anchor="ctr"/>
           <a:lstStyle/>
           <a:p>
-            <a:pPr indent="0" marL="0">
+            <a:pPr marL="0" indent="0">
               <a:lnSpc>
                 <a:spcPct val="105000"/>
               </a:lnSpc>
@@ -3981,7 +3681,7 @@
             <a:prstDash val="solid"/>
           </a:ln>
           <a:effectLst>
-            <a:outerShdw sx="100000" sy="100000" kx="0" ky="0" algn="bl" rotWithShape="0" blurRad="76200" dist="25400" dir="5400000">
+            <a:outerShdw blurRad="76200" dist="25400" dir="5400000" algn="bl" rotWithShape="0">
               <a:srgbClr val="0B1220">
                 <a:alpha val="18000"/>
               </a:srgbClr>
@@ -4010,7 +3710,7 @@
           <a:bodyPr wrap="square" lIns="0" tIns="0" rIns="0" bIns="0" rtlCol="0" anchor="ctr"/>
           <a:lstStyle/>
           <a:p>
-            <a:pPr indent="0" marL="0">
+            <a:pPr marL="0" indent="0">
               <a:buNone/>
             </a:pPr>
             <a:r>
@@ -4049,7 +3749,7 @@
           <a:bodyPr wrap="square" lIns="0" tIns="0" rIns="0" bIns="0" rtlCol="0" anchor="ctr"/>
           <a:lstStyle/>
           <a:p>
-            <a:pPr indent="0" marL="0">
+            <a:pPr marL="0" indent="0">
               <a:buNone/>
             </a:pPr>
             <a:r>
@@ -4088,7 +3788,7 @@
           <a:bodyPr wrap="square" lIns="0" tIns="0" rIns="0" bIns="0" rtlCol="0" anchor="ctr"/>
           <a:lstStyle/>
           <a:p>
-            <a:pPr indent="0" marL="0">
+            <a:pPr marL="0" indent="0">
               <a:lnSpc>
                 <a:spcPct val="105000"/>
               </a:lnSpc>
@@ -4183,7 +3883,7 @@
             <a:prstDash val="solid"/>
           </a:ln>
           <a:effectLst>
-            <a:outerShdw sx="100000" sy="100000" kx="0" ky="0" algn="bl" rotWithShape="0" blurRad="76200" dist="25400" dir="5400000">
+            <a:outerShdw blurRad="76200" dist="25400" dir="5400000" algn="bl" rotWithShape="0">
               <a:srgbClr val="0B1220">
                 <a:alpha val="18000"/>
               </a:srgbClr>
@@ -4212,7 +3912,7 @@
           <a:bodyPr wrap="square" lIns="0" tIns="0" rIns="0" bIns="0" rtlCol="0" anchor="ctr"/>
           <a:lstStyle/>
           <a:p>
-            <a:pPr indent="0" marL="0">
+            <a:pPr marL="0" indent="0">
               <a:buNone/>
             </a:pPr>
             <a:r>
@@ -4251,7 +3951,7 @@
           <a:bodyPr wrap="square" lIns="0" tIns="0" rIns="0" bIns="0" rtlCol="0" anchor="ctr"/>
           <a:lstStyle/>
           <a:p>
-            <a:pPr indent="0" marL="0">
+            <a:pPr marL="0" indent="0">
               <a:buNone/>
             </a:pPr>
             <a:r>
@@ -4290,7 +3990,7 @@
           <a:bodyPr wrap="square" lIns="0" tIns="0" rIns="0" bIns="0" rtlCol="0" anchor="ctr"/>
           <a:lstStyle/>
           <a:p>
-            <a:pPr indent="0" marL="0">
+            <a:pPr marL="0" indent="0">
               <a:lnSpc>
                 <a:spcPct val="105000"/>
               </a:lnSpc>
@@ -4385,7 +4085,7 @@
             <a:prstDash val="solid"/>
           </a:ln>
           <a:effectLst>
-            <a:outerShdw sx="100000" sy="100000" kx="0" ky="0" algn="bl" rotWithShape="0" blurRad="76200" dist="25400" dir="5400000">
+            <a:outerShdw blurRad="76200" dist="25400" dir="5400000" algn="bl" rotWithShape="0">
               <a:srgbClr val="0B1220">
                 <a:alpha val="18000"/>
               </a:srgbClr>
@@ -4414,7 +4114,7 @@
           <a:bodyPr wrap="square" lIns="0" tIns="0" rIns="0" bIns="0" rtlCol="0" anchor="ctr"/>
           <a:lstStyle/>
           <a:p>
-            <a:pPr indent="0" marL="0">
+            <a:pPr marL="0" indent="0">
               <a:buNone/>
             </a:pPr>
             <a:r>
@@ -4453,7 +4153,7 @@
           <a:bodyPr wrap="square" lIns="0" tIns="0" rIns="0" bIns="0" rtlCol="0" anchor="ctr"/>
           <a:lstStyle/>
           <a:p>
-            <a:pPr indent="0" marL="0">
+            <a:pPr marL="0" indent="0">
               <a:buNone/>
             </a:pPr>
             <a:r>
@@ -4492,7 +4192,7 @@
           <a:bodyPr wrap="square" lIns="0" tIns="0" rIns="0" bIns="0" rtlCol="0" anchor="ctr"/>
           <a:lstStyle/>
           <a:p>
-            <a:pPr indent="0" marL="0">
+            <a:pPr marL="0" indent="0">
               <a:lnSpc>
                 <a:spcPct val="105000"/>
               </a:lnSpc>
@@ -4587,7 +4287,7 @@
             <a:prstDash val="solid"/>
           </a:ln>
           <a:effectLst>
-            <a:outerShdw sx="100000" sy="100000" kx="0" ky="0" algn="bl" rotWithShape="0" blurRad="76200" dist="25400" dir="5400000">
+            <a:outerShdw blurRad="76200" dist="25400" dir="5400000" algn="bl" rotWithShape="0">
               <a:srgbClr val="0B1220">
                 <a:alpha val="18000"/>
               </a:srgbClr>
@@ -4616,7 +4316,7 @@
           <a:bodyPr wrap="square" lIns="0" tIns="0" rIns="0" bIns="0" rtlCol="0" anchor="ctr"/>
           <a:lstStyle/>
           <a:p>
-            <a:pPr indent="0" marL="0">
+            <a:pPr marL="0" indent="0">
               <a:buNone/>
             </a:pPr>
             <a:r>
@@ -4655,7 +4355,7 @@
           <a:bodyPr wrap="square" lIns="0" tIns="0" rIns="0" bIns="0" rtlCol="0" anchor="ctr"/>
           <a:lstStyle/>
           <a:p>
-            <a:pPr indent="0" marL="0">
+            <a:pPr marL="0" indent="0">
               <a:buNone/>
             </a:pPr>
             <a:r>
@@ -4694,7 +4394,7 @@
           <a:bodyPr wrap="square" lIns="0" tIns="0" rIns="0" bIns="0" rtlCol="0" anchor="ctr"/>
           <a:lstStyle/>
           <a:p>
-            <a:pPr indent="0" marL="0">
+            <a:pPr marL="0" indent="0">
               <a:lnSpc>
                 <a:spcPct val="105000"/>
               </a:lnSpc>
@@ -4741,7 +4441,7 @@
             <a:prstDash val="solid"/>
           </a:ln>
           <a:effectLst>
-            <a:outerShdw sx="100000" sy="100000" kx="0" ky="0" algn="bl" rotWithShape="0" blurRad="76200" dist="25400" dir="5400000">
+            <a:outerShdw blurRad="76200" dist="25400" dir="5400000" algn="bl" rotWithShape="0">
               <a:srgbClr val="0B1220">
                 <a:alpha val="18000"/>
               </a:srgbClr>
@@ -4770,7 +4470,7 @@
           <a:bodyPr wrap="square" lIns="0" tIns="0" rIns="0" bIns="0" rtlCol="0" anchor="ctr"/>
           <a:lstStyle/>
           <a:p>
-            <a:pPr indent="0" marL="0">
+            <a:pPr marL="0" indent="0">
               <a:lnSpc>
                 <a:spcPct val="120000"/>
               </a:lnSpc>
@@ -4812,11 +4512,11 @@
           <a:bodyPr wrap="square" lIns="0" tIns="0" rIns="0" bIns="0" rtlCol="0" anchor="ctr"/>
           <a:lstStyle/>
           <a:p>
-            <a:pPr algn="l" indent="0" marL="0">
-              <a:buNone/>
-            </a:pPr>
-            <a:r>
-              <a:rPr lang="en-US" sz="900" spc="100" kern="0" dirty="0">
+            <a:pPr marL="0" indent="0" algn="l">
+              <a:buNone/>
+            </a:pPr>
+            <a:r>
+              <a:rPr lang="en-US" sz="900" kern="0" spc="100" dirty="0">
                 <a:solidFill>
                   <a:srgbClr val="9FB0CC"/>
                 </a:solidFill>
@@ -4851,7 +4551,7 @@
           <a:bodyPr wrap="square" lIns="0" tIns="0" rIns="0" bIns="0" rtlCol="0" anchor="ctr"/>
           <a:lstStyle/>
           <a:p>
-            <a:pPr algn="r" indent="0" marL="0">
+            <a:pPr marL="0" indent="0" algn="r">
               <a:buNone/>
             </a:pPr>
             <a:r>
@@ -4885,6 +4585,7 @@
         <a:solidFill>
           <a:srgbClr val="EAF1FB"/>
         </a:solidFill>
+        <a:effectLst/>
       </p:bgPr>
     </p:bg>
     <p:spTree>
@@ -4922,11 +4623,11 @@
           <a:bodyPr wrap="square" lIns="0" tIns="0" rIns="0" bIns="0" rtlCol="0" anchor="ctr"/>
           <a:lstStyle/>
           <a:p>
-            <a:pPr algn="l" indent="0" marL="0">
-              <a:buNone/>
-            </a:pPr>
-            <a:r>
-              <a:rPr lang="en-US" sz="1100" b="1" spc="200" kern="0" dirty="0">
+            <a:pPr marL="0" indent="0" algn="l">
+              <a:buNone/>
+            </a:pPr>
+            <a:r>
+              <a:rPr lang="en-US" sz="1100" b="1" kern="0" spc="200" dirty="0">
                 <a:solidFill>
                   <a:srgbClr val="0E8FA0"/>
                 </a:solidFill>
@@ -4961,7 +4662,7 @@
           <a:bodyPr wrap="square" lIns="0" tIns="0" rIns="0" bIns="0" rtlCol="0" anchor="ctr"/>
           <a:lstStyle/>
           <a:p>
-            <a:pPr algn="l" indent="0" marL="0">
+            <a:pPr marL="0" indent="0" algn="l">
               <a:buNone/>
             </a:pPr>
             <a:r>
@@ -5000,7 +4701,7 @@
           <a:bodyPr wrap="square" lIns="0" tIns="0" rIns="0" bIns="0" rtlCol="0" anchor="ctr"/>
           <a:lstStyle/>
           <a:p>
-            <a:pPr indent="0" marL="0">
+            <a:pPr marL="0" indent="0">
               <a:buNone/>
             </a:pPr>
             <a:r>
@@ -5186,7 +4887,7 @@
             <a:prstDash val="solid"/>
           </a:ln>
           <a:effectLst>
-            <a:outerShdw sx="100000" sy="100000" kx="0" ky="0" algn="bl" rotWithShape="0" blurRad="76200" dist="25400" dir="5400000">
+            <a:outerShdw blurRad="76200" dist="25400" dir="5400000" algn="bl" rotWithShape="0">
               <a:srgbClr val="0B1220">
                 <a:alpha val="18000"/>
               </a:srgbClr>
@@ -5215,11 +4916,11 @@
           <a:bodyPr wrap="square" lIns="0" tIns="0" rIns="0" bIns="0" rtlCol="0" anchor="ctr"/>
           <a:lstStyle/>
           <a:p>
-            <a:pPr indent="0" marL="0">
-              <a:buNone/>
-            </a:pPr>
-            <a:r>
-              <a:rPr lang="en-US" sz="1050" b="1" spc="120" kern="0" dirty="0">
+            <a:pPr marL="0" indent="0">
+              <a:buNone/>
+            </a:pPr>
+            <a:r>
+              <a:rPr lang="en-US" sz="1050" b="1" kern="0" spc="120" dirty="0">
                 <a:solidFill>
                   <a:srgbClr val="17C3D6"/>
                 </a:solidFill>
@@ -5277,7 +4978,7 @@
           <a:bodyPr wrap="square" lIns="0" tIns="0" rIns="0" bIns="0" rtlCol="0" anchor="ctr"/>
           <a:lstStyle/>
           <a:p>
-            <a:pPr indent="0" marL="0">
+            <a:pPr marL="0" indent="0">
               <a:buNone/>
             </a:pPr>
             <a:r>
@@ -5316,7 +5017,7 @@
           <a:bodyPr wrap="square" lIns="0" tIns="0" rIns="0" bIns="0" rtlCol="0" anchor="ctr"/>
           <a:lstStyle/>
           <a:p>
-            <a:pPr indent="0" marL="0">
+            <a:pPr marL="0" indent="0">
               <a:buNone/>
             </a:pPr>
             <a:r>
@@ -5378,7 +5079,7 @@
           <a:bodyPr wrap="square" lIns="0" tIns="0" rIns="0" bIns="0" rtlCol="0" anchor="ctr"/>
           <a:lstStyle/>
           <a:p>
-            <a:pPr indent="0" marL="0">
+            <a:pPr marL="0" indent="0">
               <a:buNone/>
             </a:pPr>
             <a:r>
@@ -5417,7 +5118,7 @@
           <a:bodyPr wrap="square" lIns="0" tIns="0" rIns="0" bIns="0" rtlCol="0" anchor="ctr"/>
           <a:lstStyle/>
           <a:p>
-            <a:pPr indent="0" marL="0">
+            <a:pPr marL="0" indent="0">
               <a:buNone/>
             </a:pPr>
             <a:r>
@@ -5479,7 +5180,7 @@
           <a:bodyPr wrap="square" lIns="0" tIns="0" rIns="0" bIns="0" rtlCol="0" anchor="ctr"/>
           <a:lstStyle/>
           <a:p>
-            <a:pPr indent="0" marL="0">
+            <a:pPr marL="0" indent="0">
               <a:buNone/>
             </a:pPr>
             <a:r>
@@ -5518,7 +5219,7 @@
           <a:bodyPr wrap="square" lIns="0" tIns="0" rIns="0" bIns="0" rtlCol="0" anchor="ctr"/>
           <a:lstStyle/>
           <a:p>
-            <a:pPr indent="0" marL="0">
+            <a:pPr marL="0" indent="0">
               <a:buNone/>
             </a:pPr>
             <a:r>
@@ -5580,7 +5281,7 @@
           <a:bodyPr wrap="square" lIns="0" tIns="0" rIns="0" bIns="0" rtlCol="0" anchor="ctr"/>
           <a:lstStyle/>
           <a:p>
-            <a:pPr indent="0" marL="0">
+            <a:pPr marL="0" indent="0">
               <a:buNone/>
             </a:pPr>
             <a:r>
@@ -5619,7 +5320,7 @@
           <a:bodyPr wrap="square" lIns="0" tIns="0" rIns="0" bIns="0" rtlCol="0" anchor="ctr"/>
           <a:lstStyle/>
           <a:p>
-            <a:pPr indent="0" marL="0">
+            <a:pPr marL="0" indent="0">
               <a:buNone/>
             </a:pPr>
             <a:r>
@@ -5681,7 +5382,7 @@
           <a:bodyPr wrap="square" lIns="0" tIns="0" rIns="0" bIns="0" rtlCol="0" anchor="ctr"/>
           <a:lstStyle/>
           <a:p>
-            <a:pPr indent="0" marL="0">
+            <a:pPr marL="0" indent="0">
               <a:buNone/>
             </a:pPr>
             <a:r>
@@ -5720,7 +5421,7 @@
           <a:bodyPr wrap="square" lIns="0" tIns="0" rIns="0" bIns="0" rtlCol="0" anchor="ctr"/>
           <a:lstStyle/>
           <a:p>
-            <a:pPr indent="0" marL="0">
+            <a:pPr marL="0" indent="0">
               <a:buNone/>
             </a:pPr>
             <a:r>
@@ -5759,11 +5460,11 @@
           <a:bodyPr wrap="square" lIns="0" tIns="0" rIns="0" bIns="0" rtlCol="0" anchor="ctr"/>
           <a:lstStyle/>
           <a:p>
-            <a:pPr algn="l" indent="0" marL="0">
-              <a:buNone/>
-            </a:pPr>
-            <a:r>
-              <a:rPr lang="en-US" sz="900" spc="100" kern="0" dirty="0">
+            <a:pPr marL="0" indent="0" algn="l">
+              <a:buNone/>
+            </a:pPr>
+            <a:r>
+              <a:rPr lang="en-US" sz="900" kern="0" spc="100" dirty="0">
                 <a:solidFill>
                   <a:srgbClr val="9FB0CC"/>
                 </a:solidFill>
@@ -5798,7 +5499,7 @@
           <a:bodyPr wrap="square" lIns="0" tIns="0" rIns="0" bIns="0" rtlCol="0" anchor="ctr"/>
           <a:lstStyle/>
           <a:p>
-            <a:pPr algn="r" indent="0" marL="0">
+            <a:pPr marL="0" indent="0" algn="r">
               <a:buNone/>
             </a:pPr>
             <a:r>
@@ -5832,6 +5533,7 @@
         <a:solidFill>
           <a:srgbClr val="0B1220"/>
         </a:solidFill>
+        <a:effectLst/>
       </p:bgPr>
     </p:bg>
     <p:spTree>
@@ -5869,11 +5571,11 @@
           <a:bodyPr wrap="square" lIns="0" tIns="0" rIns="0" bIns="0" rtlCol="0" anchor="ctr"/>
           <a:lstStyle/>
           <a:p>
-            <a:pPr algn="l" indent="0" marL="0">
-              <a:buNone/>
-            </a:pPr>
-            <a:r>
-              <a:rPr lang="en-US" sz="1100" b="1" spc="200" kern="0" dirty="0">
+            <a:pPr marL="0" indent="0" algn="l">
+              <a:buNone/>
+            </a:pPr>
+            <a:r>
+              <a:rPr lang="en-US" sz="1100" b="1" kern="0" spc="200" dirty="0">
                 <a:solidFill>
                   <a:srgbClr val="17C3D6"/>
                 </a:solidFill>
@@ -5908,7 +5610,7 @@
           <a:bodyPr wrap="square" lIns="0" tIns="0" rIns="0" bIns="0" rtlCol="0" anchor="ctr"/>
           <a:lstStyle/>
           <a:p>
-            <a:pPr algn="l" indent="0" marL="0">
+            <a:pPr marL="0" indent="0" algn="l">
               <a:buNone/>
             </a:pPr>
             <a:r>
@@ -5952,7 +5654,7 @@
             <a:prstDash val="solid"/>
           </a:ln>
           <a:effectLst>
-            <a:outerShdw sx="100000" sy="100000" kx="0" ky="0" algn="bl" rotWithShape="0" blurRad="76200" dist="25400" dir="5400000">
+            <a:outerShdw blurRad="76200" dist="25400" dir="5400000" algn="bl" rotWithShape="0">
               <a:srgbClr val="0B1220">
                 <a:alpha val="18000"/>
               </a:srgbClr>
@@ -6001,7 +5703,7 @@
           <a:bodyPr wrap="square" lIns="0" tIns="0" rIns="0" bIns="0" rtlCol="0" anchor="ctr"/>
           <a:lstStyle/>
           <a:p>
-            <a:pPr algn="ctr" indent="0" marL="0">
+            <a:pPr marL="0" indent="0" algn="ctr">
               <a:buNone/>
             </a:pPr>
             <a:r>
@@ -6040,7 +5742,7 @@
           <a:bodyPr wrap="square" lIns="0" tIns="0" rIns="0" bIns="0" rtlCol="0" anchor="ctr"/>
           <a:lstStyle/>
           <a:p>
-            <a:pPr indent="0" marL="0">
+            <a:pPr marL="0" indent="0">
               <a:buNone/>
             </a:pPr>
             <a:r>
@@ -6079,7 +5781,7 @@
           <a:bodyPr wrap="square" lIns="0" tIns="0" rIns="0" bIns="0" rtlCol="0" anchor="ctr"/>
           <a:lstStyle/>
           <a:p>
-            <a:pPr indent="0" marL="0">
+            <a:pPr marL="0" indent="0">
               <a:lnSpc>
                 <a:spcPct val="120000"/>
               </a:lnSpc>
@@ -6126,7 +5828,7 @@
             <a:prstDash val="solid"/>
           </a:ln>
           <a:effectLst>
-            <a:outerShdw sx="100000" sy="100000" kx="0" ky="0" algn="bl" rotWithShape="0" blurRad="76200" dist="25400" dir="5400000">
+            <a:outerShdw blurRad="76200" dist="25400" dir="5400000" algn="bl" rotWithShape="0">
               <a:srgbClr val="0B1220">
                 <a:alpha val="18000"/>
               </a:srgbClr>
@@ -6175,7 +5877,7 @@
           <a:bodyPr wrap="square" lIns="0" tIns="0" rIns="0" bIns="0" rtlCol="0" anchor="ctr"/>
           <a:lstStyle/>
           <a:p>
-            <a:pPr algn="ctr" indent="0" marL="0">
+            <a:pPr marL="0" indent="0" algn="ctr">
               <a:buNone/>
             </a:pPr>
             <a:r>
@@ -6214,7 +5916,7 @@
           <a:bodyPr wrap="square" lIns="0" tIns="0" rIns="0" bIns="0" rtlCol="0" anchor="ctr"/>
           <a:lstStyle/>
           <a:p>
-            <a:pPr indent="0" marL="0">
+            <a:pPr marL="0" indent="0">
               <a:buNone/>
             </a:pPr>
             <a:r>
@@ -6253,7 +5955,7 @@
           <a:bodyPr wrap="square" lIns="0" tIns="0" rIns="0" bIns="0" rtlCol="0" anchor="ctr"/>
           <a:lstStyle/>
           <a:p>
-            <a:pPr indent="0" marL="0">
+            <a:pPr marL="0" indent="0">
               <a:lnSpc>
                 <a:spcPct val="120000"/>
               </a:lnSpc>
@@ -6300,7 +6002,7 @@
             <a:prstDash val="solid"/>
           </a:ln>
           <a:effectLst>
-            <a:outerShdw sx="100000" sy="100000" kx="0" ky="0" algn="bl" rotWithShape="0" blurRad="76200" dist="25400" dir="5400000">
+            <a:outerShdw blurRad="76200" dist="25400" dir="5400000" algn="bl" rotWithShape="0">
               <a:srgbClr val="0B1220">
                 <a:alpha val="18000"/>
               </a:srgbClr>
@@ -6349,7 +6051,7 @@
           <a:bodyPr wrap="square" lIns="0" tIns="0" rIns="0" bIns="0" rtlCol="0" anchor="ctr"/>
           <a:lstStyle/>
           <a:p>
-            <a:pPr algn="ctr" indent="0" marL="0">
+            <a:pPr marL="0" indent="0" algn="ctr">
               <a:buNone/>
             </a:pPr>
             <a:r>
@@ -6388,7 +6090,7 @@
           <a:bodyPr wrap="square" lIns="0" tIns="0" rIns="0" bIns="0" rtlCol="0" anchor="ctr"/>
           <a:lstStyle/>
           <a:p>
-            <a:pPr indent="0" marL="0">
+            <a:pPr marL="0" indent="0">
               <a:buNone/>
             </a:pPr>
             <a:r>
@@ -6427,7 +6129,7 @@
           <a:bodyPr wrap="square" lIns="0" tIns="0" rIns="0" bIns="0" rtlCol="0" anchor="ctr"/>
           <a:lstStyle/>
           <a:p>
-            <a:pPr indent="0" marL="0">
+            <a:pPr marL="0" indent="0">
               <a:lnSpc>
                 <a:spcPct val="120000"/>
               </a:lnSpc>
@@ -6474,7 +6176,7 @@
             <a:prstDash val="solid"/>
           </a:ln>
           <a:effectLst>
-            <a:outerShdw sx="100000" sy="100000" kx="0" ky="0" algn="bl" rotWithShape="0" blurRad="76200" dist="25400" dir="5400000">
+            <a:outerShdw blurRad="76200" dist="25400" dir="5400000" algn="bl" rotWithShape="0">
               <a:srgbClr val="0B1220">
                 <a:alpha val="18000"/>
               </a:srgbClr>
@@ -6523,7 +6225,7 @@
           <a:bodyPr wrap="square" lIns="0" tIns="0" rIns="0" bIns="0" rtlCol="0" anchor="ctr"/>
           <a:lstStyle/>
           <a:p>
-            <a:pPr algn="ctr" indent="0" marL="0">
+            <a:pPr marL="0" indent="0" algn="ctr">
               <a:buNone/>
             </a:pPr>
             <a:r>
@@ -6562,7 +6264,7 @@
           <a:bodyPr wrap="square" lIns="0" tIns="0" rIns="0" bIns="0" rtlCol="0" anchor="ctr"/>
           <a:lstStyle/>
           <a:p>
-            <a:pPr indent="0" marL="0">
+            <a:pPr marL="0" indent="0">
               <a:buNone/>
             </a:pPr>
             <a:r>
@@ -6601,7 +6303,7 @@
           <a:bodyPr wrap="square" lIns="0" tIns="0" rIns="0" bIns="0" rtlCol="0" anchor="ctr"/>
           <a:lstStyle/>
           <a:p>
-            <a:pPr indent="0" marL="0">
+            <a:pPr marL="0" indent="0">
               <a:lnSpc>
                 <a:spcPct val="120000"/>
               </a:lnSpc>
@@ -6643,11 +6345,11 @@
           <a:bodyPr wrap="square" lIns="0" tIns="0" rIns="0" bIns="0" rtlCol="0" anchor="ctr"/>
           <a:lstStyle/>
           <a:p>
-            <a:pPr algn="l" indent="0" marL="0">
-              <a:buNone/>
-            </a:pPr>
-            <a:r>
-              <a:rPr lang="en-US" sz="900" spc="100" kern="0" dirty="0">
+            <a:pPr marL="0" indent="0" algn="l">
+              <a:buNone/>
+            </a:pPr>
+            <a:r>
+              <a:rPr lang="en-US" sz="900" kern="0" spc="100" dirty="0">
                 <a:solidFill>
                   <a:srgbClr val="5B6B85"/>
                 </a:solidFill>
@@ -6682,7 +6384,7 @@
           <a:bodyPr wrap="square" lIns="0" tIns="0" rIns="0" bIns="0" rtlCol="0" anchor="ctr"/>
           <a:lstStyle/>
           <a:p>
-            <a:pPr algn="r" indent="0" marL="0">
+            <a:pPr marL="0" indent="0" algn="r">
               <a:buNone/>
             </a:pPr>
             <a:r>
@@ -6716,6 +6418,7 @@
         <a:solidFill>
           <a:srgbClr val="FFFFFF"/>
         </a:solidFill>
+        <a:effectLst/>
       </p:bgPr>
     </p:bg>
     <p:spTree>
@@ -6753,11 +6456,11 @@
           <a:bodyPr wrap="square" lIns="0" tIns="0" rIns="0" bIns="0" rtlCol="0" anchor="ctr"/>
           <a:lstStyle/>
           <a:p>
-            <a:pPr algn="l" indent="0" marL="0">
-              <a:buNone/>
-            </a:pPr>
-            <a:r>
-              <a:rPr lang="en-US" sz="1100" b="1" spc="200" kern="0" dirty="0">
+            <a:pPr marL="0" indent="0" algn="l">
+              <a:buNone/>
+            </a:pPr>
+            <a:r>
+              <a:rPr lang="en-US" sz="1100" b="1" kern="0" spc="200" dirty="0">
                 <a:solidFill>
                   <a:srgbClr val="17C3D6"/>
                 </a:solidFill>
@@ -6792,7 +6495,7 @@
           <a:bodyPr wrap="square" lIns="0" tIns="0" rIns="0" bIns="0" rtlCol="0" anchor="ctr"/>
           <a:lstStyle/>
           <a:p>
-            <a:pPr algn="l" indent="0" marL="0">
+            <a:pPr marL="0" indent="0" algn="l">
               <a:buNone/>
             </a:pPr>
             <a:r>
@@ -6954,7 +6657,7 @@
             <a:prstDash val="solid"/>
           </a:ln>
           <a:effectLst>
-            <a:outerShdw sx="100000" sy="100000" kx="0" ky="0" algn="bl" rotWithShape="0" blurRad="76200" dist="25400" dir="5400000">
+            <a:outerShdw blurRad="76200" dist="25400" dir="5400000" algn="bl" rotWithShape="0">
               <a:srgbClr val="0B1220">
                 <a:alpha val="18000"/>
               </a:srgbClr>
@@ -7003,11 +6706,11 @@
           <a:bodyPr wrap="square" lIns="0" tIns="0" rIns="0" bIns="0" rtlCol="0" anchor="ctr"/>
           <a:lstStyle/>
           <a:p>
-            <a:pPr indent="0" marL="0">
-              <a:buNone/>
-            </a:pPr>
-            <a:r>
-              <a:rPr lang="en-US" sz="1100" b="1" spc="150" kern="0" dirty="0">
+            <a:pPr marL="0" indent="0">
+              <a:buNone/>
+            </a:pPr>
+            <a:r>
+              <a:rPr lang="en-US" sz="1100" b="1" kern="0" spc="150" dirty="0">
                 <a:solidFill>
                   <a:srgbClr val="17C3D6"/>
                 </a:solidFill>
@@ -7042,7 +6745,7 @@
           <a:bodyPr wrap="square" lIns="0" tIns="0" rIns="0" bIns="0" rtlCol="0" anchor="ctr"/>
           <a:lstStyle/>
           <a:p>
-            <a:pPr indent="0" marL="0">
+            <a:pPr marL="0" indent="0">
               <a:lnSpc>
                 <a:spcPct val="105000"/>
               </a:lnSpc>
@@ -7062,7 +6765,7 @@
             <a:endParaRPr lang="en-US" sz="3000" dirty="0"/>
           </a:p>
           <a:p>
-            <a:pPr indent="0" marL="0">
+            <a:pPr marL="0" indent="0">
               <a:lnSpc>
                 <a:spcPct val="105000"/>
               </a:lnSpc>
@@ -7104,7 +6807,7 @@
           <a:bodyPr wrap="square" lIns="0" tIns="0" rIns="0" bIns="0" rtlCol="0" anchor="ctr"/>
           <a:lstStyle/>
           <a:p>
-            <a:pPr indent="0" marL="0">
+            <a:pPr marL="0" indent="0">
               <a:lnSpc>
                 <a:spcPct val="125000"/>
               </a:lnSpc>
@@ -7146,11 +6849,11 @@
           <a:bodyPr wrap="square" lIns="0" tIns="0" rIns="0" bIns="0" rtlCol="0" anchor="ctr"/>
           <a:lstStyle/>
           <a:p>
-            <a:pPr algn="l" indent="0" marL="0">
-              <a:buNone/>
-            </a:pPr>
-            <a:r>
-              <a:rPr lang="en-US" sz="900" spc="100" kern="0" dirty="0">
+            <a:pPr marL="0" indent="0" algn="l">
+              <a:buNone/>
+            </a:pPr>
+            <a:r>
+              <a:rPr lang="en-US" sz="900" kern="0" spc="100" dirty="0">
                 <a:solidFill>
                   <a:srgbClr val="9FB0CC"/>
                 </a:solidFill>
@@ -7185,7 +6888,7 @@
           <a:bodyPr wrap="square" lIns="0" tIns="0" rIns="0" bIns="0" rtlCol="0" anchor="ctr"/>
           <a:lstStyle/>
           <a:p>
-            <a:pPr algn="r" indent="0" marL="0">
+            <a:pPr marL="0" indent="0" algn="r">
               <a:buNone/>
             </a:pPr>
             <a:r>
@@ -7219,6 +6922,7 @@
         <a:solidFill>
           <a:srgbClr val="FFFFFF"/>
         </a:solidFill>
+        <a:effectLst/>
       </p:bgPr>
     </p:bg>
     <p:spTree>
@@ -7256,11 +6960,11 @@
           <a:bodyPr wrap="square" lIns="0" tIns="0" rIns="0" bIns="0" rtlCol="0" anchor="ctr"/>
           <a:lstStyle/>
           <a:p>
-            <a:pPr algn="l" indent="0" marL="0">
-              <a:buNone/>
-            </a:pPr>
-            <a:r>
-              <a:rPr lang="en-US" sz="1100" b="1" spc="200" kern="0" dirty="0">
+            <a:pPr marL="0" indent="0" algn="l">
+              <a:buNone/>
+            </a:pPr>
+            <a:r>
+              <a:rPr lang="en-US" sz="1100" b="1" kern="0" spc="200" dirty="0">
                 <a:solidFill>
                   <a:srgbClr val="0E8FA0"/>
                 </a:solidFill>
@@ -7295,7 +6999,7 @@
           <a:bodyPr wrap="square" lIns="0" tIns="0" rIns="0" bIns="0" rtlCol="0" anchor="ctr"/>
           <a:lstStyle/>
           <a:p>
-            <a:pPr algn="l" indent="0" marL="0">
+            <a:pPr marL="0" indent="0" algn="l">
               <a:buNone/>
             </a:pPr>
             <a:r>
@@ -7457,7 +7161,7 @@
             <a:prstDash val="solid"/>
           </a:ln>
           <a:effectLst>
-            <a:outerShdw sx="100000" sy="100000" kx="0" ky="0" algn="bl" rotWithShape="0" blurRad="76200" dist="25400" dir="5400000">
+            <a:outerShdw blurRad="76200" dist="25400" dir="5400000" algn="bl" rotWithShape="0">
               <a:srgbClr val="0B1220">
                 <a:alpha val="18000"/>
               </a:srgbClr>
@@ -7506,11 +7210,11 @@
           <a:bodyPr wrap="square" lIns="0" tIns="0" rIns="0" bIns="0" rtlCol="0" anchor="ctr"/>
           <a:lstStyle/>
           <a:p>
-            <a:pPr indent="0" marL="0">
-              <a:buNone/>
-            </a:pPr>
-            <a:r>
-              <a:rPr lang="en-US" sz="1100" b="1" spc="150" kern="0" dirty="0">
+            <a:pPr marL="0" indent="0">
+              <a:buNone/>
+            </a:pPr>
+            <a:r>
+              <a:rPr lang="en-US" sz="1100" b="1" kern="0" spc="150" dirty="0">
                 <a:solidFill>
                   <a:srgbClr val="F5A623"/>
                 </a:solidFill>
@@ -7545,7 +7249,7 @@
           <a:bodyPr wrap="square" lIns="0" tIns="0" rIns="0" bIns="0" rtlCol="0" anchor="ctr"/>
           <a:lstStyle/>
           <a:p>
-            <a:pPr indent="0" marL="0">
+            <a:pPr marL="0" indent="0">
               <a:lnSpc>
                 <a:spcPct val="105000"/>
               </a:lnSpc>
@@ -7565,7 +7269,7 @@
             <a:endParaRPr lang="en-US" sz="3000" dirty="0"/>
           </a:p>
           <a:p>
-            <a:pPr indent="0" marL="0">
+            <a:pPr marL="0" indent="0">
               <a:lnSpc>
                 <a:spcPct val="105000"/>
               </a:lnSpc>
@@ -7607,7 +7311,7 @@
           <a:bodyPr wrap="square" lIns="0" tIns="0" rIns="0" bIns="0" rtlCol="0" anchor="ctr"/>
           <a:lstStyle/>
           <a:p>
-            <a:pPr indent="0" marL="0">
+            <a:pPr marL="0" indent="0">
               <a:lnSpc>
                 <a:spcPct val="125000"/>
               </a:lnSpc>
@@ -7649,11 +7353,11 @@
           <a:bodyPr wrap="square" lIns="0" tIns="0" rIns="0" bIns="0" rtlCol="0" anchor="ctr"/>
           <a:lstStyle/>
           <a:p>
-            <a:pPr algn="l" indent="0" marL="0">
-              <a:buNone/>
-            </a:pPr>
-            <a:r>
-              <a:rPr lang="en-US" sz="900" spc="100" kern="0" dirty="0">
+            <a:pPr marL="0" indent="0" algn="l">
+              <a:buNone/>
+            </a:pPr>
+            <a:r>
+              <a:rPr lang="en-US" sz="900" kern="0" spc="100" dirty="0">
                 <a:solidFill>
                   <a:srgbClr val="9FB0CC"/>
                 </a:solidFill>
@@ -7688,7 +7392,7 @@
           <a:bodyPr wrap="square" lIns="0" tIns="0" rIns="0" bIns="0" rtlCol="0" anchor="ctr"/>
           <a:lstStyle/>
           <a:p>
-            <a:pPr algn="r" indent="0" marL="0">
+            <a:pPr marL="0" indent="0" algn="r">
               <a:buNone/>
             </a:pPr>
             <a:r>
@@ -7722,6 +7426,7 @@
         <a:solidFill>
           <a:srgbClr val="FFFFFF"/>
         </a:solidFill>
+        <a:effectLst/>
       </p:bgPr>
     </p:bg>
     <p:spTree>
@@ -7759,11 +7464,11 @@
           <a:bodyPr wrap="square" lIns="0" tIns="0" rIns="0" bIns="0" rtlCol="0" anchor="ctr"/>
           <a:lstStyle/>
           <a:p>
-            <a:pPr algn="l" indent="0" marL="0">
-              <a:buNone/>
-            </a:pPr>
-            <a:r>
-              <a:rPr lang="en-US" sz="1100" b="1" spc="200" kern="0" dirty="0">
+            <a:pPr marL="0" indent="0" algn="l">
+              <a:buNone/>
+            </a:pPr>
+            <a:r>
+              <a:rPr lang="en-US" sz="1100" b="1" kern="0" spc="200" dirty="0">
                 <a:solidFill>
                   <a:srgbClr val="3DDC97"/>
                 </a:solidFill>
@@ -7798,7 +7503,7 @@
           <a:bodyPr wrap="square" lIns="0" tIns="0" rIns="0" bIns="0" rtlCol="0" anchor="ctr"/>
           <a:lstStyle/>
           <a:p>
-            <a:pPr algn="l" indent="0" marL="0">
+            <a:pPr marL="0" indent="0" algn="l">
               <a:buNone/>
             </a:pPr>
             <a:r>
@@ -7960,7 +7665,7 @@
             <a:prstDash val="solid"/>
           </a:ln>
           <a:effectLst>
-            <a:outerShdw sx="100000" sy="100000" kx="0" ky="0" algn="bl" rotWithShape="0" blurRad="76200" dist="25400" dir="5400000">
+            <a:outerShdw blurRad="76200" dist="25400" dir="5400000" algn="bl" rotWithShape="0">
               <a:srgbClr val="0B1220">
                 <a:alpha val="18000"/>
               </a:srgbClr>
@@ -8009,11 +7714,11 @@
           <a:bodyPr wrap="square" lIns="0" tIns="0" rIns="0" bIns="0" rtlCol="0" anchor="ctr"/>
           <a:lstStyle/>
           <a:p>
-            <a:pPr indent="0" marL="0">
-              <a:buNone/>
-            </a:pPr>
-            <a:r>
-              <a:rPr lang="en-US" sz="1100" b="1" spc="150" kern="0" dirty="0">
+            <a:pPr marL="0" indent="0">
+              <a:buNone/>
+            </a:pPr>
+            <a:r>
+              <a:rPr lang="en-US" sz="1100" b="1" kern="0" spc="150" dirty="0">
                 <a:solidFill>
                   <a:srgbClr val="3DDC97"/>
                 </a:solidFill>
@@ -8048,7 +7753,7 @@
           <a:bodyPr wrap="square" lIns="0" tIns="0" rIns="0" bIns="0" rtlCol="0" anchor="ctr"/>
           <a:lstStyle/>
           <a:p>
-            <a:pPr indent="0" marL="0">
+            <a:pPr marL="0" indent="0">
               <a:lnSpc>
                 <a:spcPct val="105000"/>
               </a:lnSpc>
@@ -8068,7 +7773,7 @@
             <a:endParaRPr lang="en-US" sz="3000" dirty="0"/>
           </a:p>
           <a:p>
-            <a:pPr indent="0" marL="0">
+            <a:pPr marL="0" indent="0">
               <a:lnSpc>
                 <a:spcPct val="105000"/>
               </a:lnSpc>
@@ -8110,7 +7815,7 @@
           <a:bodyPr wrap="square" lIns="0" tIns="0" rIns="0" bIns="0" rtlCol="0" anchor="ctr"/>
           <a:lstStyle/>
           <a:p>
-            <a:pPr indent="0" marL="0">
+            <a:pPr marL="0" indent="0">
               <a:lnSpc>
                 <a:spcPct val="125000"/>
               </a:lnSpc>
@@ -8152,11 +7857,11 @@
           <a:bodyPr wrap="square" lIns="0" tIns="0" rIns="0" bIns="0" rtlCol="0" anchor="ctr"/>
           <a:lstStyle/>
           <a:p>
-            <a:pPr algn="l" indent="0" marL="0">
-              <a:buNone/>
-            </a:pPr>
-            <a:r>
-              <a:rPr lang="en-US" sz="900" spc="100" kern="0" dirty="0">
+            <a:pPr marL="0" indent="0" algn="l">
+              <a:buNone/>
+            </a:pPr>
+            <a:r>
+              <a:rPr lang="en-US" sz="900" kern="0" spc="100" dirty="0">
                 <a:solidFill>
                   <a:srgbClr val="9FB0CC"/>
                 </a:solidFill>
@@ -8191,7 +7896,7 @@
           <a:bodyPr wrap="square" lIns="0" tIns="0" rIns="0" bIns="0" rtlCol="0" anchor="ctr"/>
           <a:lstStyle/>
           <a:p>
-            <a:pPr algn="r" indent="0" marL="0">
+            <a:pPr marL="0" indent="0" algn="r">
               <a:buNone/>
             </a:pPr>
             <a:r>
@@ -8225,6 +7930,7 @@
         <a:solidFill>
           <a:srgbClr val="FFFFFF"/>
         </a:solidFill>
+        <a:effectLst/>
       </p:bgPr>
     </p:bg>
     <p:spTree>
@@ -8262,11 +7968,11 @@
           <a:bodyPr wrap="square" lIns="0" tIns="0" rIns="0" bIns="0" rtlCol="0" anchor="ctr"/>
           <a:lstStyle/>
           <a:p>
-            <a:pPr algn="l" indent="0" marL="0">
-              <a:buNone/>
-            </a:pPr>
-            <a:r>
-              <a:rPr lang="en-US" sz="1100" b="1" spc="200" kern="0" dirty="0">
+            <a:pPr marL="0" indent="0" algn="l">
+              <a:buNone/>
+            </a:pPr>
+            <a:r>
+              <a:rPr lang="en-US" sz="1100" b="1" kern="0" spc="200" dirty="0">
                 <a:solidFill>
                   <a:srgbClr val="FF5A5F"/>
                 </a:solidFill>
@@ -8301,7 +8007,7 @@
           <a:bodyPr wrap="square" lIns="0" tIns="0" rIns="0" bIns="0" rtlCol="0" anchor="ctr"/>
           <a:lstStyle/>
           <a:p>
-            <a:pPr algn="l" indent="0" marL="0">
+            <a:pPr marL="0" indent="0" algn="l">
               <a:buNone/>
             </a:pPr>
             <a:r>
@@ -8463,7 +8169,7 @@
             <a:prstDash val="solid"/>
           </a:ln>
           <a:effectLst>
-            <a:outerShdw sx="100000" sy="100000" kx="0" ky="0" algn="bl" rotWithShape="0" blurRad="76200" dist="25400" dir="5400000">
+            <a:outerShdw blurRad="76200" dist="25400" dir="5400000" algn="bl" rotWithShape="0">
               <a:srgbClr val="0B1220">
                 <a:alpha val="18000"/>
               </a:srgbClr>
@@ -8512,11 +8218,11 @@
           <a:bodyPr wrap="square" lIns="0" tIns="0" rIns="0" bIns="0" rtlCol="0" anchor="ctr"/>
           <a:lstStyle/>
           <a:p>
-            <a:pPr indent="0" marL="0">
-              <a:buNone/>
-            </a:pPr>
-            <a:r>
-              <a:rPr lang="en-US" sz="1100" b="1" spc="150" kern="0" dirty="0">
+            <a:pPr marL="0" indent="0">
+              <a:buNone/>
+            </a:pPr>
+            <a:r>
+              <a:rPr lang="en-US" sz="1100" b="1" kern="0" spc="150" dirty="0">
                 <a:solidFill>
                   <a:srgbClr val="FF5A5F"/>
                 </a:solidFill>
@@ -8551,7 +8257,7 @@
           <a:bodyPr wrap="square" lIns="0" tIns="0" rIns="0" bIns="0" rtlCol="0" anchor="ctr"/>
           <a:lstStyle/>
           <a:p>
-            <a:pPr indent="0" marL="0">
+            <a:pPr marL="0" indent="0">
               <a:lnSpc>
                 <a:spcPct val="105000"/>
               </a:lnSpc>
@@ -8571,7 +8277,7 @@
             <a:endParaRPr lang="en-US" sz="3000" dirty="0"/>
           </a:p>
           <a:p>
-            <a:pPr indent="0" marL="0">
+            <a:pPr marL="0" indent="0">
               <a:lnSpc>
                 <a:spcPct val="105000"/>
               </a:lnSpc>
@@ -8613,7 +8319,7 @@
           <a:bodyPr wrap="square" lIns="0" tIns="0" rIns="0" bIns="0" rtlCol="0" anchor="ctr"/>
           <a:lstStyle/>
           <a:p>
-            <a:pPr indent="0" marL="0">
+            <a:pPr marL="0" indent="0">
               <a:lnSpc>
                 <a:spcPct val="125000"/>
               </a:lnSpc>
@@ -8655,11 +8361,11 @@
           <a:bodyPr wrap="square" lIns="0" tIns="0" rIns="0" bIns="0" rtlCol="0" anchor="ctr"/>
           <a:lstStyle/>
           <a:p>
-            <a:pPr algn="l" indent="0" marL="0">
-              <a:buNone/>
-            </a:pPr>
-            <a:r>
-              <a:rPr lang="en-US" sz="900" spc="100" kern="0" dirty="0">
+            <a:pPr marL="0" indent="0" algn="l">
+              <a:buNone/>
+            </a:pPr>
+            <a:r>
+              <a:rPr lang="en-US" sz="900" kern="0" spc="100" dirty="0">
                 <a:solidFill>
                   <a:srgbClr val="9FB0CC"/>
                 </a:solidFill>
@@ -8694,7 +8400,7 @@
           <a:bodyPr wrap="square" lIns="0" tIns="0" rIns="0" bIns="0" rtlCol="0" anchor="ctr"/>
           <a:lstStyle/>
           <a:p>
-            <a:pPr algn="r" indent="0" marL="0">
+            <a:pPr marL="0" indent="0" algn="r">
               <a:buNone/>
             </a:pPr>
             <a:r>
@@ -8728,6 +8434,7 @@
         <a:solidFill>
           <a:srgbClr val="0B1220"/>
         </a:solidFill>
+        <a:effectLst/>
       </p:bgPr>
     </p:bg>
     <p:spTree>
@@ -8805,7 +8512,7 @@
           <a:bodyPr wrap="square" lIns="0" tIns="0" rIns="0" bIns="0" rtlCol="0" anchor="ctr"/>
           <a:lstStyle/>
           <a:p>
-            <a:pPr algn="ctr" indent="0" marL="0">
+            <a:pPr marL="0" indent="0" algn="ctr">
               <a:buNone/>
             </a:pPr>
             <a:r>
@@ -8844,11 +8551,11 @@
           <a:bodyPr wrap="square" lIns="0" tIns="0" rIns="0" bIns="0" rtlCol="0" anchor="ctr"/>
           <a:lstStyle/>
           <a:p>
-            <a:pPr indent="0" marL="0">
-              <a:buNone/>
-            </a:pPr>
-            <a:r>
-              <a:rPr lang="en-US" sz="1200" b="1" spc="200" kern="0" dirty="0">
+            <a:pPr marL="0" indent="0">
+              <a:buNone/>
+            </a:pPr>
+            <a:r>
+              <a:rPr lang="en-US" sz="1200" b="1" kern="0" spc="200" dirty="0">
                 <a:solidFill>
                   <a:srgbClr val="17C3D6"/>
                 </a:solidFill>
@@ -8883,7 +8590,7 @@
           <a:bodyPr wrap="square" lIns="0" tIns="0" rIns="0" bIns="0" rtlCol="0" anchor="ctr"/>
           <a:lstStyle/>
           <a:p>
-            <a:pPr indent="0" marL="0">
+            <a:pPr marL="0" indent="0">
               <a:lnSpc>
                 <a:spcPct val="108000"/>
               </a:lnSpc>
@@ -8903,7 +8610,7 @@
             <a:endParaRPr lang="en-US" sz="3600" dirty="0"/>
           </a:p>
           <a:p>
-            <a:pPr indent="0" marL="0">
+            <a:pPr marL="0" indent="0">
               <a:lnSpc>
                 <a:spcPct val="108000"/>
               </a:lnSpc>
@@ -9044,7 +8751,7 @@
             <a:prstDash val="solid"/>
           </a:ln>
           <a:effectLst>
-            <a:outerShdw sx="100000" sy="100000" kx="0" ky="0" algn="bl" rotWithShape="0" blurRad="76200" dist="25400" dir="5400000">
+            <a:outerShdw blurRad="76200" dist="25400" dir="5400000" algn="bl" rotWithShape="0">
               <a:srgbClr val="0B1220">
                 <a:alpha val="18000"/>
               </a:srgbClr>
@@ -9073,7 +8780,7 @@
           <a:bodyPr wrap="square" lIns="0" tIns="0" rIns="0" bIns="0" rtlCol="0" anchor="ctr"/>
           <a:lstStyle/>
           <a:p>
-            <a:pPr algn="ctr" indent="0" marL="0">
+            <a:pPr marL="0" indent="0" algn="ctr">
               <a:buNone/>
             </a:pPr>
             <a:r>
@@ -9112,7 +8819,7 @@
           <a:bodyPr wrap="square" lIns="0" tIns="0" rIns="0" bIns="0" rtlCol="0" anchor="ctr"/>
           <a:lstStyle/>
           <a:p>
-            <a:pPr algn="ctr" indent="0" marL="0">
+            <a:pPr marL="0" indent="0" algn="ctr">
               <a:lnSpc>
                 <a:spcPct val="130000"/>
               </a:lnSpc>
@@ -9132,7 +8839,7 @@
             <a:endParaRPr lang="en-US" sz="1200" dirty="0"/>
           </a:p>
           <a:p>
-            <a:pPr algn="ctr" indent="0" marL="0">
+            <a:pPr marL="0" indent="0" algn="ctr">
               <a:lnSpc>
                 <a:spcPct val="130000"/>
               </a:lnSpc>
@@ -9152,7 +8859,7 @@
             <a:endParaRPr lang="en-US" sz="1200" dirty="0"/>
           </a:p>
           <a:p>
-            <a:pPr algn="ctr" indent="0" marL="0">
+            <a:pPr marL="0" indent="0" algn="ctr">
               <a:lnSpc>
                 <a:spcPct val="130000"/>
               </a:lnSpc>
@@ -9194,11 +8901,11 @@
           <a:bodyPr wrap="square" lIns="0" tIns="0" rIns="0" bIns="0" rtlCol="0" anchor="ctr"/>
           <a:lstStyle/>
           <a:p>
-            <a:pPr algn="l" indent="0" marL="0">
-              <a:buNone/>
-            </a:pPr>
-            <a:r>
-              <a:rPr lang="en-US" sz="900" spc="100" kern="0" dirty="0">
+            <a:pPr marL="0" indent="0" algn="l">
+              <a:buNone/>
+            </a:pPr>
+            <a:r>
+              <a:rPr lang="en-US" sz="900" kern="0" spc="100" dirty="0">
                 <a:solidFill>
                   <a:srgbClr val="5B6B85"/>
                 </a:solidFill>
@@ -9233,7 +8940,7 @@
           <a:bodyPr wrap="square" lIns="0" tIns="0" rIns="0" bIns="0" rtlCol="0" anchor="ctr"/>
           <a:lstStyle/>
           <a:p>
-            <a:pPr algn="r" indent="0" marL="0">
+            <a:pPr marL="0" indent="0" algn="r">
               <a:buNone/>
             </a:pPr>
             <a:r>
@@ -9267,6 +8974,7 @@
         <a:solidFill>
           <a:srgbClr val="EAF1FB"/>
         </a:solidFill>
+        <a:effectLst/>
       </p:bgPr>
     </p:bg>
     <p:spTree>
@@ -9304,11 +9012,11 @@
           <a:bodyPr wrap="square" lIns="0" tIns="0" rIns="0" bIns="0" rtlCol="0" anchor="ctr"/>
           <a:lstStyle/>
           <a:p>
-            <a:pPr algn="l" indent="0" marL="0">
-              <a:buNone/>
-            </a:pPr>
-            <a:r>
-              <a:rPr lang="en-US" sz="1100" b="1" spc="200" kern="0" dirty="0">
+            <a:pPr marL="0" indent="0" algn="l">
+              <a:buNone/>
+            </a:pPr>
+            <a:r>
+              <a:rPr lang="en-US" sz="1100" b="1" kern="0" spc="200" dirty="0">
                 <a:solidFill>
                   <a:srgbClr val="0E8FA0"/>
                 </a:solidFill>
@@ -9343,7 +9051,7 @@
           <a:bodyPr wrap="square" lIns="0" tIns="0" rIns="0" bIns="0" rtlCol="0" anchor="ctr"/>
           <a:lstStyle/>
           <a:p>
-            <a:pPr algn="l" indent="0" marL="0">
+            <a:pPr marL="0" indent="0" algn="l">
               <a:buNone/>
             </a:pPr>
             <a:r>
@@ -9505,7 +9213,7 @@
             <a:prstDash val="solid"/>
           </a:ln>
           <a:effectLst>
-            <a:outerShdw sx="100000" sy="100000" kx="0" ky="0" algn="bl" rotWithShape="0" blurRad="76200" dist="25400" dir="5400000">
+            <a:outerShdw blurRad="76200" dist="25400" dir="5400000" algn="bl" rotWithShape="0">
               <a:srgbClr val="0B1220">
                 <a:alpha val="18000"/>
               </a:srgbClr>
@@ -9534,11 +9242,11 @@
           <a:bodyPr wrap="square" lIns="0" tIns="0" rIns="0" bIns="0" rtlCol="0" anchor="ctr"/>
           <a:lstStyle/>
           <a:p>
-            <a:pPr indent="0" marL="0">
-              <a:buNone/>
-            </a:pPr>
-            <a:r>
-              <a:rPr lang="en-US" sz="1100" b="1" spc="200" kern="0" dirty="0">
+            <a:pPr marL="0" indent="0">
+              <a:buNone/>
+            </a:pPr>
+            <a:r>
+              <a:rPr lang="en-US" sz="1100" b="1" kern="0" spc="200" dirty="0">
                 <a:solidFill>
                   <a:srgbClr val="17C3D6"/>
                 </a:solidFill>
@@ -9593,7 +9301,7 @@
           <a:bodyPr wrap="square" lIns="0" tIns="0" rIns="0" bIns="0" rtlCol="0" anchor="ctr"/>
           <a:lstStyle/>
           <a:p>
-            <a:pPr algn="ctr" indent="0" marL="0">
+            <a:pPr marL="0" indent="0" algn="ctr">
               <a:buNone/>
             </a:pPr>
             <a:r>
@@ -9632,7 +9340,7 @@
           <a:bodyPr wrap="square" lIns="0" tIns="0" rIns="0" bIns="0" rtlCol="0" anchor="ctr"/>
           <a:lstStyle/>
           <a:p>
-            <a:pPr indent="0" marL="0">
+            <a:pPr marL="0" indent="0">
               <a:buNone/>
             </a:pPr>
             <a:r>
@@ -9671,7 +9379,7 @@
           <a:bodyPr wrap="square" lIns="0" tIns="0" rIns="0" bIns="0" rtlCol="0" anchor="ctr"/>
           <a:lstStyle/>
           <a:p>
-            <a:pPr indent="0" marL="0">
+            <a:pPr marL="0" indent="0">
               <a:buNone/>
             </a:pPr>
             <a:r>
@@ -9754,7 +9462,7 @@
           <a:bodyPr wrap="square" lIns="0" tIns="0" rIns="0" bIns="0" rtlCol="0" anchor="ctr"/>
           <a:lstStyle/>
           <a:p>
-            <a:pPr algn="ctr" indent="0" marL="0">
+            <a:pPr marL="0" indent="0" algn="ctr">
               <a:buNone/>
             </a:pPr>
             <a:r>
@@ -9793,7 +9501,7 @@
           <a:bodyPr wrap="square" lIns="0" tIns="0" rIns="0" bIns="0" rtlCol="0" anchor="ctr"/>
           <a:lstStyle/>
           <a:p>
-            <a:pPr indent="0" marL="0">
+            <a:pPr marL="0" indent="0">
               <a:buNone/>
             </a:pPr>
             <a:r>
@@ -9832,7 +9540,7 @@
           <a:bodyPr wrap="square" lIns="0" tIns="0" rIns="0" bIns="0" rtlCol="0" anchor="ctr"/>
           <a:lstStyle/>
           <a:p>
-            <a:pPr indent="0" marL="0">
+            <a:pPr marL="0" indent="0">
               <a:buNone/>
             </a:pPr>
             <a:r>
@@ -9915,7 +9623,7 @@
           <a:bodyPr wrap="square" lIns="0" tIns="0" rIns="0" bIns="0" rtlCol="0" anchor="ctr"/>
           <a:lstStyle/>
           <a:p>
-            <a:pPr algn="ctr" indent="0" marL="0">
+            <a:pPr marL="0" indent="0" algn="ctr">
               <a:buNone/>
             </a:pPr>
             <a:r>
@@ -9954,7 +9662,7 @@
           <a:bodyPr wrap="square" lIns="0" tIns="0" rIns="0" bIns="0" rtlCol="0" anchor="ctr"/>
           <a:lstStyle/>
           <a:p>
-            <a:pPr indent="0" marL="0">
+            <a:pPr marL="0" indent="0">
               <a:buNone/>
             </a:pPr>
             <a:r>
@@ -9993,7 +9701,7 @@
           <a:bodyPr wrap="square" lIns="0" tIns="0" rIns="0" bIns="0" rtlCol="0" anchor="ctr"/>
           <a:lstStyle/>
           <a:p>
-            <a:pPr indent="0" marL="0">
+            <a:pPr marL="0" indent="0">
               <a:buNone/>
             </a:pPr>
             <a:r>
@@ -10076,7 +9784,7 @@
           <a:bodyPr wrap="square" lIns="0" tIns="0" rIns="0" bIns="0" rtlCol="0" anchor="ctr"/>
           <a:lstStyle/>
           <a:p>
-            <a:pPr algn="ctr" indent="0" marL="0">
+            <a:pPr marL="0" indent="0" algn="ctr">
               <a:buNone/>
             </a:pPr>
             <a:r>
@@ -10115,7 +9823,7 @@
           <a:bodyPr wrap="square" lIns="0" tIns="0" rIns="0" bIns="0" rtlCol="0" anchor="ctr"/>
           <a:lstStyle/>
           <a:p>
-            <a:pPr indent="0" marL="0">
+            <a:pPr marL="0" indent="0">
               <a:buNone/>
             </a:pPr>
             <a:r>
@@ -10154,7 +9862,7 @@
           <a:bodyPr wrap="square" lIns="0" tIns="0" rIns="0" bIns="0" rtlCol="0" anchor="ctr"/>
           <a:lstStyle/>
           <a:p>
-            <a:pPr indent="0" marL="0">
+            <a:pPr marL="0" indent="0">
               <a:buNone/>
             </a:pPr>
             <a:r>
@@ -10193,11 +9901,11 @@
           <a:bodyPr wrap="square" lIns="0" tIns="0" rIns="0" bIns="0" rtlCol="0" anchor="ctr"/>
           <a:lstStyle/>
           <a:p>
-            <a:pPr algn="l" indent="0" marL="0">
-              <a:buNone/>
-            </a:pPr>
-            <a:r>
-              <a:rPr lang="en-US" sz="900" spc="100" kern="0" dirty="0">
+            <a:pPr marL="0" indent="0" algn="l">
+              <a:buNone/>
+            </a:pPr>
+            <a:r>
+              <a:rPr lang="en-US" sz="900" kern="0" spc="100" dirty="0">
                 <a:solidFill>
                   <a:srgbClr val="9FB0CC"/>
                 </a:solidFill>
@@ -10232,7 +9940,7 @@
           <a:bodyPr wrap="square" lIns="0" tIns="0" rIns="0" bIns="0" rtlCol="0" anchor="ctr"/>
           <a:lstStyle/>
           <a:p>
-            <a:pPr algn="r" indent="0" marL="0">
+            <a:pPr marL="0" indent="0" algn="r">
               <a:buNone/>
             </a:pPr>
             <a:r>
@@ -10266,6 +9974,7 @@
         <a:solidFill>
           <a:srgbClr val="FFFFFF"/>
         </a:solidFill>
+        <a:effectLst/>
       </p:bgPr>
     </p:bg>
     <p:spTree>
@@ -10303,11 +10012,11 @@
           <a:bodyPr wrap="square" lIns="0" tIns="0" rIns="0" bIns="0" rtlCol="0" anchor="ctr"/>
           <a:lstStyle/>
           <a:p>
-            <a:pPr algn="l" indent="0" marL="0">
-              <a:buNone/>
-            </a:pPr>
-            <a:r>
-              <a:rPr lang="en-US" sz="1100" b="1" spc="200" kern="0" dirty="0">
+            <a:pPr marL="0" indent="0" algn="l">
+              <a:buNone/>
+            </a:pPr>
+            <a:r>
+              <a:rPr lang="en-US" sz="1100" b="1" kern="0" spc="200" dirty="0">
                 <a:solidFill>
                   <a:srgbClr val="0E8FA0"/>
                 </a:solidFill>
@@ -10342,7 +10051,7 @@
           <a:bodyPr wrap="square" lIns="0" tIns="0" rIns="0" bIns="0" rtlCol="0" anchor="ctr"/>
           <a:lstStyle/>
           <a:p>
-            <a:pPr algn="l" indent="0" marL="0">
+            <a:pPr marL="0" indent="0" algn="l">
               <a:buNone/>
             </a:pPr>
             <a:r>
@@ -10386,7 +10095,7 @@
             <a:prstDash val="solid"/>
           </a:ln>
           <a:effectLst>
-            <a:outerShdw sx="100000" sy="100000" kx="0" ky="0" algn="bl" rotWithShape="0" blurRad="76200" dist="25400" dir="5400000">
+            <a:outerShdw blurRad="76200" dist="25400" dir="5400000" algn="bl" rotWithShape="0">
               <a:srgbClr val="0B1220">
                 <a:alpha val="18000"/>
               </a:srgbClr>
@@ -10435,7 +10144,7 @@
           <a:bodyPr wrap="square" lIns="0" tIns="0" rIns="0" bIns="0" rtlCol="0" anchor="ctr"/>
           <a:lstStyle/>
           <a:p>
-            <a:pPr algn="ctr" indent="0" marL="0">
+            <a:pPr marL="0" indent="0" algn="ctr">
               <a:buNone/>
             </a:pPr>
             <a:r>
@@ -10474,7 +10183,7 @@
           <a:bodyPr wrap="square" lIns="0" tIns="0" rIns="0" bIns="0" rtlCol="0" anchor="ctr"/>
           <a:lstStyle/>
           <a:p>
-            <a:pPr indent="0" marL="0">
+            <a:pPr marL="0" indent="0">
               <a:buNone/>
             </a:pPr>
             <a:r>
@@ -10513,7 +10222,7 @@
           <a:bodyPr wrap="square" lIns="0" tIns="0" rIns="0" bIns="0" rtlCol="0" anchor="ctr"/>
           <a:lstStyle/>
           <a:p>
-            <a:pPr indent="0" marL="0">
+            <a:pPr marL="0" indent="0">
               <a:lnSpc>
                 <a:spcPct val="105000"/>
               </a:lnSpc>
@@ -10560,7 +10269,7 @@
             <a:prstDash val="solid"/>
           </a:ln>
           <a:effectLst>
-            <a:outerShdw sx="100000" sy="100000" kx="0" ky="0" algn="bl" rotWithShape="0" blurRad="76200" dist="25400" dir="5400000">
+            <a:outerShdw blurRad="76200" dist="25400" dir="5400000" algn="bl" rotWithShape="0">
               <a:srgbClr val="0B1220">
                 <a:alpha val="18000"/>
               </a:srgbClr>
@@ -10609,7 +10318,7 @@
           <a:bodyPr wrap="square" lIns="0" tIns="0" rIns="0" bIns="0" rtlCol="0" anchor="ctr"/>
           <a:lstStyle/>
           <a:p>
-            <a:pPr algn="ctr" indent="0" marL="0">
+            <a:pPr marL="0" indent="0" algn="ctr">
               <a:buNone/>
             </a:pPr>
             <a:r>
@@ -10648,7 +10357,7 @@
           <a:bodyPr wrap="square" lIns="0" tIns="0" rIns="0" bIns="0" rtlCol="0" anchor="ctr"/>
           <a:lstStyle/>
           <a:p>
-            <a:pPr indent="0" marL="0">
+            <a:pPr marL="0" indent="0">
               <a:buNone/>
             </a:pPr>
             <a:r>
@@ -10687,7 +10396,7 @@
           <a:bodyPr wrap="square" lIns="0" tIns="0" rIns="0" bIns="0" rtlCol="0" anchor="ctr"/>
           <a:lstStyle/>
           <a:p>
-            <a:pPr indent="0" marL="0">
+            <a:pPr marL="0" indent="0">
               <a:lnSpc>
                 <a:spcPct val="105000"/>
               </a:lnSpc>
@@ -10734,7 +10443,7 @@
             <a:prstDash val="solid"/>
           </a:ln>
           <a:effectLst>
-            <a:outerShdw sx="100000" sy="100000" kx="0" ky="0" algn="bl" rotWithShape="0" blurRad="76200" dist="25400" dir="5400000">
+            <a:outerShdw blurRad="76200" dist="25400" dir="5400000" algn="bl" rotWithShape="0">
               <a:srgbClr val="0B1220">
                 <a:alpha val="18000"/>
               </a:srgbClr>
@@ -10783,7 +10492,7 @@
           <a:bodyPr wrap="square" lIns="0" tIns="0" rIns="0" bIns="0" rtlCol="0" anchor="ctr"/>
           <a:lstStyle/>
           <a:p>
-            <a:pPr algn="ctr" indent="0" marL="0">
+            <a:pPr marL="0" indent="0" algn="ctr">
               <a:buNone/>
             </a:pPr>
             <a:r>
@@ -10822,7 +10531,7 @@
           <a:bodyPr wrap="square" lIns="0" tIns="0" rIns="0" bIns="0" rtlCol="0" anchor="ctr"/>
           <a:lstStyle/>
           <a:p>
-            <a:pPr indent="0" marL="0">
+            <a:pPr marL="0" indent="0">
               <a:buNone/>
             </a:pPr>
             <a:r>
@@ -10861,7 +10570,7 @@
           <a:bodyPr wrap="square" lIns="0" tIns="0" rIns="0" bIns="0" rtlCol="0" anchor="ctr"/>
           <a:lstStyle/>
           <a:p>
-            <a:pPr indent="0" marL="0">
+            <a:pPr marL="0" indent="0">
               <a:lnSpc>
                 <a:spcPct val="105000"/>
               </a:lnSpc>
@@ -10908,7 +10617,7 @@
             <a:prstDash val="solid"/>
           </a:ln>
           <a:effectLst>
-            <a:outerShdw sx="100000" sy="100000" kx="0" ky="0" algn="bl" rotWithShape="0" blurRad="76200" dist="25400" dir="5400000">
+            <a:outerShdw blurRad="76200" dist="25400" dir="5400000" algn="bl" rotWithShape="0">
               <a:srgbClr val="0B1220">
                 <a:alpha val="18000"/>
               </a:srgbClr>
@@ -10957,7 +10666,7 @@
           <a:bodyPr wrap="square" lIns="0" tIns="0" rIns="0" bIns="0" rtlCol="0" anchor="ctr"/>
           <a:lstStyle/>
           <a:p>
-            <a:pPr algn="ctr" indent="0" marL="0">
+            <a:pPr marL="0" indent="0" algn="ctr">
               <a:buNone/>
             </a:pPr>
             <a:r>
@@ -10996,7 +10705,7 @@
           <a:bodyPr wrap="square" lIns="0" tIns="0" rIns="0" bIns="0" rtlCol="0" anchor="ctr"/>
           <a:lstStyle/>
           <a:p>
-            <a:pPr indent="0" marL="0">
+            <a:pPr marL="0" indent="0">
               <a:buNone/>
             </a:pPr>
             <a:r>
@@ -11035,7 +10744,7 @@
           <a:bodyPr wrap="square" lIns="0" tIns="0" rIns="0" bIns="0" rtlCol="0" anchor="ctr"/>
           <a:lstStyle/>
           <a:p>
-            <a:pPr indent="0" marL="0">
+            <a:pPr marL="0" indent="0">
               <a:lnSpc>
                 <a:spcPct val="105000"/>
               </a:lnSpc>
@@ -11082,7 +10791,7 @@
             <a:prstDash val="solid"/>
           </a:ln>
           <a:effectLst>
-            <a:outerShdw sx="100000" sy="100000" kx="0" ky="0" algn="bl" rotWithShape="0" blurRad="76200" dist="25400" dir="5400000">
+            <a:outerShdw blurRad="76200" dist="25400" dir="5400000" algn="bl" rotWithShape="0">
               <a:srgbClr val="0B1220">
                 <a:alpha val="18000"/>
               </a:srgbClr>
@@ -11131,7 +10840,7 @@
           <a:bodyPr wrap="square" lIns="0" tIns="0" rIns="0" bIns="0" rtlCol="0" anchor="ctr"/>
           <a:lstStyle/>
           <a:p>
-            <a:pPr algn="ctr" indent="0" marL="0">
+            <a:pPr marL="0" indent="0" algn="ctr">
               <a:buNone/>
             </a:pPr>
             <a:r>
@@ -11170,7 +10879,7 @@
           <a:bodyPr wrap="square" lIns="0" tIns="0" rIns="0" bIns="0" rtlCol="0" anchor="ctr"/>
           <a:lstStyle/>
           <a:p>
-            <a:pPr indent="0" marL="0">
+            <a:pPr marL="0" indent="0">
               <a:buNone/>
             </a:pPr>
             <a:r>
@@ -11209,7 +10918,7 @@
           <a:bodyPr wrap="square" lIns="0" tIns="0" rIns="0" bIns="0" rtlCol="0" anchor="ctr"/>
           <a:lstStyle/>
           <a:p>
-            <a:pPr indent="0" marL="0">
+            <a:pPr marL="0" indent="0">
               <a:lnSpc>
                 <a:spcPct val="105000"/>
               </a:lnSpc>
@@ -11256,7 +10965,7 @@
             <a:prstDash val="solid"/>
           </a:ln>
           <a:effectLst>
-            <a:outerShdw sx="100000" sy="100000" kx="0" ky="0" algn="bl" rotWithShape="0" blurRad="76200" dist="25400" dir="5400000">
+            <a:outerShdw blurRad="76200" dist="25400" dir="5400000" algn="bl" rotWithShape="0">
               <a:srgbClr val="0B1220">
                 <a:alpha val="18000"/>
               </a:srgbClr>
@@ -11305,7 +11014,7 @@
           <a:bodyPr wrap="square" lIns="0" tIns="0" rIns="0" bIns="0" rtlCol="0" anchor="ctr"/>
           <a:lstStyle/>
           <a:p>
-            <a:pPr algn="ctr" indent="0" marL="0">
+            <a:pPr marL="0" indent="0" algn="ctr">
               <a:buNone/>
             </a:pPr>
             <a:r>
@@ -11344,7 +11053,7 @@
           <a:bodyPr wrap="square" lIns="0" tIns="0" rIns="0" bIns="0" rtlCol="0" anchor="ctr"/>
           <a:lstStyle/>
           <a:p>
-            <a:pPr indent="0" marL="0">
+            <a:pPr marL="0" indent="0">
               <a:buNone/>
             </a:pPr>
             <a:r>
@@ -11383,7 +11092,7 @@
           <a:bodyPr wrap="square" lIns="0" tIns="0" rIns="0" bIns="0" rtlCol="0" anchor="ctr"/>
           <a:lstStyle/>
           <a:p>
-            <a:pPr indent="0" marL="0">
+            <a:pPr marL="0" indent="0">
               <a:lnSpc>
                 <a:spcPct val="105000"/>
               </a:lnSpc>
@@ -11447,7 +11156,7 @@
           <a:bodyPr wrap="square" lIns="0" tIns="0" rIns="0" bIns="0" rtlCol="0" anchor="ctr"/>
           <a:lstStyle/>
           <a:p>
-            <a:pPr algn="ctr" indent="0" marL="0">
+            <a:pPr marL="0" indent="0" algn="ctr">
               <a:buNone/>
             </a:pPr>
             <a:r>
@@ -11486,11 +11195,11 @@
           <a:bodyPr wrap="square" lIns="0" tIns="0" rIns="0" bIns="0" rtlCol="0" anchor="ctr"/>
           <a:lstStyle/>
           <a:p>
-            <a:pPr algn="l" indent="0" marL="0">
-              <a:buNone/>
-            </a:pPr>
-            <a:r>
-              <a:rPr lang="en-US" sz="900" spc="100" kern="0" dirty="0">
+            <a:pPr marL="0" indent="0" algn="l">
+              <a:buNone/>
+            </a:pPr>
+            <a:r>
+              <a:rPr lang="en-US" sz="900" kern="0" spc="100" dirty="0">
                 <a:solidFill>
                   <a:srgbClr val="5B6B85"/>
                 </a:solidFill>
@@ -11525,7 +11234,7 @@
           <a:bodyPr wrap="square" lIns="0" tIns="0" rIns="0" bIns="0" rtlCol="0" anchor="ctr"/>
           <a:lstStyle/>
           <a:p>
-            <a:pPr algn="r" indent="0" marL="0">
+            <a:pPr marL="0" indent="0" algn="r">
               <a:buNone/>
             </a:pPr>
             <a:r>
@@ -11559,6 +11268,7 @@
         <a:solidFill>
           <a:srgbClr val="0B1220"/>
         </a:solidFill>
+        <a:effectLst/>
       </p:bgPr>
     </p:bg>
     <p:spTree>
@@ -11596,11 +11306,11 @@
           <a:bodyPr wrap="square" lIns="0" tIns="0" rIns="0" bIns="0" rtlCol="0" anchor="ctr"/>
           <a:lstStyle/>
           <a:p>
-            <a:pPr algn="l" indent="0" marL="0">
-              <a:buNone/>
-            </a:pPr>
-            <a:r>
-              <a:rPr lang="en-US" sz="1100" b="1" spc="200" kern="0" dirty="0">
+            <a:pPr marL="0" indent="0" algn="l">
+              <a:buNone/>
+            </a:pPr>
+            <a:r>
+              <a:rPr lang="en-US" sz="1100" b="1" kern="0" spc="200" dirty="0">
                 <a:solidFill>
                   <a:srgbClr val="17C3D6"/>
                 </a:solidFill>
@@ -11635,7 +11345,7 @@
           <a:bodyPr wrap="square" lIns="0" tIns="0" rIns="0" bIns="0" rtlCol="0" anchor="ctr"/>
           <a:lstStyle/>
           <a:p>
-            <a:pPr algn="l" indent="0" marL="0">
+            <a:pPr marL="0" indent="0" algn="l">
               <a:buNone/>
             </a:pPr>
             <a:r>
@@ -11679,7 +11389,7 @@
             <a:prstDash val="solid"/>
           </a:ln>
           <a:effectLst>
-            <a:outerShdw sx="100000" sy="100000" kx="0" ky="0" algn="bl" rotWithShape="0" blurRad="76200" dist="25400" dir="5400000">
+            <a:outerShdw blurRad="76200" dist="25400" dir="5400000" algn="bl" rotWithShape="0">
               <a:srgbClr val="0B1220">
                 <a:alpha val="18000"/>
               </a:srgbClr>
@@ -11708,7 +11418,7 @@
           <a:bodyPr wrap="square" lIns="0" tIns="0" rIns="0" bIns="0" rtlCol="0" anchor="ctr"/>
           <a:lstStyle/>
           <a:p>
-            <a:pPr algn="ctr" indent="0" marL="0">
+            <a:pPr marL="0" indent="0" algn="ctr">
               <a:lnSpc>
                 <a:spcPct val="102000"/>
               </a:lnSpc>
@@ -11728,7 +11438,7 @@
             <a:endParaRPr lang="en-US" sz="1150" dirty="0"/>
           </a:p>
           <a:p>
-            <a:pPr algn="ctr" indent="0" marL="0">
+            <a:pPr marL="0" indent="0" algn="ctr">
               <a:lnSpc>
                 <a:spcPct val="102000"/>
               </a:lnSpc>
@@ -11799,7 +11509,7 @@
             <a:prstDash val="solid"/>
           </a:ln>
           <a:effectLst>
-            <a:outerShdw sx="100000" sy="100000" kx="0" ky="0" algn="bl" rotWithShape="0" blurRad="76200" dist="25400" dir="5400000">
+            <a:outerShdw blurRad="76200" dist="25400" dir="5400000" algn="bl" rotWithShape="0">
               <a:srgbClr val="0B1220">
                 <a:alpha val="18000"/>
               </a:srgbClr>
@@ -11828,7 +11538,7 @@
           <a:bodyPr wrap="square" lIns="0" tIns="0" rIns="0" bIns="0" rtlCol="0" anchor="ctr"/>
           <a:lstStyle/>
           <a:p>
-            <a:pPr algn="ctr" indent="0" marL="0">
+            <a:pPr marL="0" indent="0" algn="ctr">
               <a:lnSpc>
                 <a:spcPct val="102000"/>
               </a:lnSpc>
@@ -11848,7 +11558,7 @@
             <a:endParaRPr lang="en-US" sz="1150" dirty="0"/>
           </a:p>
           <a:p>
-            <a:pPr algn="ctr" indent="0" marL="0">
+            <a:pPr marL="0" indent="0" algn="ctr">
               <a:lnSpc>
                 <a:spcPct val="102000"/>
               </a:lnSpc>
@@ -11868,7 +11578,7 @@
             <a:endParaRPr lang="en-US" sz="1150" dirty="0"/>
           </a:p>
           <a:p>
-            <a:pPr algn="ctr" indent="0" marL="0">
+            <a:pPr marL="0" indent="0" algn="ctr">
               <a:lnSpc>
                 <a:spcPct val="102000"/>
               </a:lnSpc>
@@ -11939,7 +11649,7 @@
             <a:prstDash val="solid"/>
           </a:ln>
           <a:effectLst>
-            <a:outerShdw sx="100000" sy="100000" kx="0" ky="0" algn="bl" rotWithShape="0" blurRad="76200" dist="25400" dir="5400000">
+            <a:outerShdw blurRad="76200" dist="25400" dir="5400000" algn="bl" rotWithShape="0">
               <a:srgbClr val="0B1220">
                 <a:alpha val="18000"/>
               </a:srgbClr>
@@ -11968,7 +11678,7 @@
           <a:bodyPr wrap="square" lIns="0" tIns="0" rIns="0" bIns="0" rtlCol="0" anchor="ctr"/>
           <a:lstStyle/>
           <a:p>
-            <a:pPr algn="ctr" indent="0" marL="0">
+            <a:pPr marL="0" indent="0" algn="ctr">
               <a:lnSpc>
                 <a:spcPct val="102000"/>
               </a:lnSpc>
@@ -11988,7 +11698,7 @@
             <a:endParaRPr lang="en-US" sz="1150" dirty="0"/>
           </a:p>
           <a:p>
-            <a:pPr algn="ctr" indent="0" marL="0">
+            <a:pPr marL="0" indent="0" algn="ctr">
               <a:lnSpc>
                 <a:spcPct val="102000"/>
               </a:lnSpc>
@@ -12059,7 +11769,7 @@
             <a:prstDash val="solid"/>
           </a:ln>
           <a:effectLst>
-            <a:outerShdw sx="100000" sy="100000" kx="0" ky="0" algn="bl" rotWithShape="0" blurRad="76200" dist="25400" dir="5400000">
+            <a:outerShdw blurRad="76200" dist="25400" dir="5400000" algn="bl" rotWithShape="0">
               <a:srgbClr val="0B1220">
                 <a:alpha val="18000"/>
               </a:srgbClr>
@@ -12088,7 +11798,7 @@
           <a:bodyPr wrap="square" lIns="0" tIns="0" rIns="0" bIns="0" rtlCol="0" anchor="ctr"/>
           <a:lstStyle/>
           <a:p>
-            <a:pPr algn="ctr" indent="0" marL="0">
+            <a:pPr marL="0" indent="0" algn="ctr">
               <a:lnSpc>
                 <a:spcPct val="102000"/>
               </a:lnSpc>
@@ -12108,7 +11818,7 @@
             <a:endParaRPr lang="en-US" sz="1150" dirty="0"/>
           </a:p>
           <a:p>
-            <a:pPr algn="ctr" indent="0" marL="0">
+            <a:pPr marL="0" indent="0" algn="ctr">
               <a:lnSpc>
                 <a:spcPct val="102000"/>
               </a:lnSpc>
@@ -12179,7 +11889,7 @@
             <a:prstDash val="solid"/>
           </a:ln>
           <a:effectLst>
-            <a:outerShdw sx="100000" sy="100000" kx="0" ky="0" algn="bl" rotWithShape="0" blurRad="76200" dist="25400" dir="5400000">
+            <a:outerShdw blurRad="76200" dist="25400" dir="5400000" algn="bl" rotWithShape="0">
               <a:srgbClr val="0B1220">
                 <a:alpha val="18000"/>
               </a:srgbClr>
@@ -12208,7 +11918,7 @@
           <a:bodyPr wrap="square" lIns="0" tIns="0" rIns="0" bIns="0" rtlCol="0" anchor="ctr"/>
           <a:lstStyle/>
           <a:p>
-            <a:pPr algn="ctr" indent="0" marL="0">
+            <a:pPr marL="0" indent="0" algn="ctr">
               <a:lnSpc>
                 <a:spcPct val="102000"/>
               </a:lnSpc>
@@ -12327,7 +12037,7 @@
             <a:prstDash val="solid"/>
           </a:ln>
           <a:effectLst>
-            <a:outerShdw sx="100000" sy="100000" kx="0" ky="0" algn="bl" rotWithShape="0" blurRad="76200" dist="25400" dir="5400000">
+            <a:outerShdw blurRad="76200" dist="25400" dir="5400000" algn="bl" rotWithShape="0">
               <a:srgbClr val="0B1220">
                 <a:alpha val="18000"/>
               </a:srgbClr>
@@ -12356,7 +12066,7 @@
           <a:bodyPr wrap="square" lIns="0" tIns="0" rIns="0" bIns="0" rtlCol="0" anchor="ctr"/>
           <a:lstStyle/>
           <a:p>
-            <a:pPr algn="ctr" indent="0" marL="0">
+            <a:pPr marL="0" indent="0" algn="ctr">
               <a:lnSpc>
                 <a:spcPct val="102000"/>
               </a:lnSpc>
@@ -12376,7 +12086,7 @@
             <a:endParaRPr lang="en-US" sz="1150" dirty="0"/>
           </a:p>
           <a:p>
-            <a:pPr algn="ctr" indent="0" marL="0">
+            <a:pPr marL="0" indent="0" algn="ctr">
               <a:lnSpc>
                 <a:spcPct val="102000"/>
               </a:lnSpc>
@@ -12423,7 +12133,7 @@
             <a:prstDash val="solid"/>
           </a:ln>
           <a:effectLst>
-            <a:outerShdw sx="100000" sy="100000" kx="0" ky="0" algn="bl" rotWithShape="0" blurRad="76200" dist="25400" dir="5400000">
+            <a:outerShdw blurRad="76200" dist="25400" dir="5400000" algn="bl" rotWithShape="0">
               <a:srgbClr val="0B1220">
                 <a:alpha val="18000"/>
               </a:srgbClr>
@@ -12452,7 +12162,7 @@
           <a:bodyPr wrap="square" lIns="0" tIns="0" rIns="0" bIns="0" rtlCol="0" anchor="ctr"/>
           <a:lstStyle/>
           <a:p>
-            <a:pPr algn="ctr" indent="0" marL="0">
+            <a:pPr marL="0" indent="0" algn="ctr">
               <a:lnSpc>
                 <a:spcPct val="102000"/>
               </a:lnSpc>
@@ -12472,7 +12182,7 @@
             <a:endParaRPr lang="en-US" sz="1150" dirty="0"/>
           </a:p>
           <a:p>
-            <a:pPr algn="ctr" indent="0" marL="0">
+            <a:pPr marL="0" indent="0" algn="ctr">
               <a:lnSpc>
                 <a:spcPct val="102000"/>
               </a:lnSpc>
@@ -12519,7 +12229,7 @@
             <a:prstDash val="solid"/>
           </a:ln>
           <a:effectLst>
-            <a:outerShdw sx="100000" sy="100000" kx="0" ky="0" algn="bl" rotWithShape="0" blurRad="76200" dist="25400" dir="5400000">
+            <a:outerShdw blurRad="76200" dist="25400" dir="5400000" algn="bl" rotWithShape="0">
               <a:srgbClr val="0B1220">
                 <a:alpha val="18000"/>
               </a:srgbClr>
@@ -12548,7 +12258,7 @@
           <a:bodyPr wrap="square" lIns="0" tIns="0" rIns="0" bIns="0" rtlCol="0" anchor="ctr"/>
           <a:lstStyle/>
           <a:p>
-            <a:pPr algn="ctr" indent="0" marL="0">
+            <a:pPr marL="0" indent="0" algn="ctr">
               <a:lnSpc>
                 <a:spcPct val="102000"/>
               </a:lnSpc>
@@ -12568,7 +12278,7 @@
             <a:endParaRPr lang="en-US" sz="1150" dirty="0"/>
           </a:p>
           <a:p>
-            <a:pPr algn="ctr" indent="0" marL="0">
+            <a:pPr marL="0" indent="0" algn="ctr">
               <a:lnSpc>
                 <a:spcPct val="102000"/>
               </a:lnSpc>
@@ -12615,7 +12325,7 @@
             <a:prstDash val="solid"/>
           </a:ln>
           <a:effectLst>
-            <a:outerShdw sx="100000" sy="100000" kx="0" ky="0" algn="bl" rotWithShape="0" blurRad="76200" dist="25400" dir="5400000">
+            <a:outerShdw blurRad="76200" dist="25400" dir="5400000" algn="bl" rotWithShape="0">
               <a:srgbClr val="0B1220">
                 <a:alpha val="18000"/>
               </a:srgbClr>
@@ -12644,7 +12354,7 @@
           <a:bodyPr wrap="square" lIns="0" tIns="0" rIns="0" bIns="0" rtlCol="0" anchor="ctr"/>
           <a:lstStyle/>
           <a:p>
-            <a:pPr algn="ctr" indent="0" marL="0">
+            <a:pPr marL="0" indent="0" algn="ctr">
               <a:lnSpc>
                 <a:spcPct val="102000"/>
               </a:lnSpc>
@@ -12664,7 +12374,7 @@
             <a:endParaRPr lang="en-US" sz="1150" dirty="0"/>
           </a:p>
           <a:p>
-            <a:pPr algn="ctr" indent="0" marL="0">
+            <a:pPr marL="0" indent="0" algn="ctr">
               <a:lnSpc>
                 <a:spcPct val="102000"/>
               </a:lnSpc>
@@ -12780,7 +12490,7 @@
           <a:bodyPr wrap="square" lIns="0" tIns="0" rIns="0" bIns="0" rtlCol="0" anchor="ctr"/>
           <a:lstStyle/>
           <a:p>
-            <a:pPr algn="ctr" indent="0" marL="0">
+            <a:pPr marL="0" indent="0" algn="ctr">
               <a:buNone/>
             </a:pPr>
             <a:r>
@@ -12819,11 +12529,11 @@
           <a:bodyPr wrap="square" lIns="0" tIns="0" rIns="0" bIns="0" rtlCol="0" anchor="ctr"/>
           <a:lstStyle/>
           <a:p>
-            <a:pPr algn="l" indent="0" marL="0">
-              <a:buNone/>
-            </a:pPr>
-            <a:r>
-              <a:rPr lang="en-US" sz="900" spc="100" kern="0" dirty="0">
+            <a:pPr marL="0" indent="0" algn="l">
+              <a:buNone/>
+            </a:pPr>
+            <a:r>
+              <a:rPr lang="en-US" sz="900" kern="0" spc="100" dirty="0">
                 <a:solidFill>
                   <a:srgbClr val="5B6B85"/>
                 </a:solidFill>
@@ -12858,7 +12568,7 @@
           <a:bodyPr wrap="square" lIns="0" tIns="0" rIns="0" bIns="0" rtlCol="0" anchor="ctr"/>
           <a:lstStyle/>
           <a:p>
-            <a:pPr algn="r" indent="0" marL="0">
+            <a:pPr marL="0" indent="0" algn="r">
               <a:buNone/>
             </a:pPr>
             <a:r>
@@ -12892,6 +12602,7 @@
         <a:solidFill>
           <a:srgbClr val="FFFFFF"/>
         </a:solidFill>
+        <a:effectLst/>
       </p:bgPr>
     </p:bg>
     <p:spTree>
@@ -12929,11 +12640,11 @@
           <a:bodyPr wrap="square" lIns="0" tIns="0" rIns="0" bIns="0" rtlCol="0" anchor="ctr"/>
           <a:lstStyle/>
           <a:p>
-            <a:pPr algn="l" indent="0" marL="0">
-              <a:buNone/>
-            </a:pPr>
-            <a:r>
-              <a:rPr lang="en-US" sz="1100" b="1" spc="200" kern="0" dirty="0">
+            <a:pPr marL="0" indent="0" algn="l">
+              <a:buNone/>
+            </a:pPr>
+            <a:r>
+              <a:rPr lang="en-US" sz="1100" b="1" kern="0" spc="200" dirty="0">
                 <a:solidFill>
                   <a:srgbClr val="0E8FA0"/>
                 </a:solidFill>
@@ -12968,7 +12679,7 @@
           <a:bodyPr wrap="square" lIns="0" tIns="0" rIns="0" bIns="0" rtlCol="0" anchor="ctr"/>
           <a:lstStyle/>
           <a:p>
-            <a:pPr algn="l" indent="0" marL="0">
+            <a:pPr marL="0" indent="0" algn="l">
               <a:buNone/>
             </a:pPr>
             <a:r>
@@ -13012,7 +12723,7 @@
             <a:prstDash val="solid"/>
           </a:ln>
           <a:effectLst>
-            <a:outerShdw sx="100000" sy="100000" kx="0" ky="0" algn="bl" rotWithShape="0" blurRad="76200" dist="25400" dir="5400000">
+            <a:outerShdw blurRad="76200" dist="25400" dir="5400000" algn="bl" rotWithShape="0">
               <a:srgbClr val="0B1220">
                 <a:alpha val="18000"/>
               </a:srgbClr>
@@ -13041,7 +12752,7 @@
           <a:bodyPr wrap="square" lIns="0" tIns="0" rIns="0" bIns="0" rtlCol="0" anchor="ctr"/>
           <a:lstStyle/>
           <a:p>
-            <a:pPr algn="ctr" indent="0" marL="0">
+            <a:pPr marL="0" indent="0" algn="ctr">
               <a:lnSpc>
                 <a:spcPct val="102000"/>
               </a:lnSpc>
@@ -13061,7 +12772,7 @@
             <a:endParaRPr lang="en-US" sz="1080" dirty="0"/>
           </a:p>
           <a:p>
-            <a:pPr algn="ctr" indent="0" marL="0">
+            <a:pPr marL="0" indent="0" algn="ctr">
               <a:lnSpc>
                 <a:spcPct val="102000"/>
               </a:lnSpc>
@@ -13132,7 +12843,7 @@
             <a:prstDash val="solid"/>
           </a:ln>
           <a:effectLst>
-            <a:outerShdw sx="100000" sy="100000" kx="0" ky="0" algn="bl" rotWithShape="0" blurRad="76200" dist="25400" dir="5400000">
+            <a:outerShdw blurRad="76200" dist="25400" dir="5400000" algn="bl" rotWithShape="0">
               <a:srgbClr val="0B1220">
                 <a:alpha val="18000"/>
               </a:srgbClr>
@@ -13161,7 +12872,7 @@
           <a:bodyPr wrap="square" lIns="0" tIns="0" rIns="0" bIns="0" rtlCol="0" anchor="ctr"/>
           <a:lstStyle/>
           <a:p>
-            <a:pPr algn="ctr" indent="0" marL="0">
+            <a:pPr marL="0" indent="0" algn="ctr">
               <a:lnSpc>
                 <a:spcPct val="102000"/>
               </a:lnSpc>
@@ -13181,7 +12892,7 @@
             <a:endParaRPr lang="en-US" sz="1080" dirty="0"/>
           </a:p>
           <a:p>
-            <a:pPr algn="ctr" indent="0" marL="0">
+            <a:pPr marL="0" indent="0" algn="ctr">
               <a:lnSpc>
                 <a:spcPct val="102000"/>
               </a:lnSpc>
@@ -13252,7 +12963,7 @@
             <a:prstDash val="solid"/>
           </a:ln>
           <a:effectLst>
-            <a:outerShdw sx="100000" sy="100000" kx="0" ky="0" algn="bl" rotWithShape="0" blurRad="76200" dist="25400" dir="5400000">
+            <a:outerShdw blurRad="76200" dist="25400" dir="5400000" algn="bl" rotWithShape="0">
               <a:srgbClr val="0B1220">
                 <a:alpha val="18000"/>
               </a:srgbClr>
@@ -13281,7 +12992,7 @@
           <a:bodyPr wrap="square" lIns="0" tIns="0" rIns="0" bIns="0" rtlCol="0" anchor="ctr"/>
           <a:lstStyle/>
           <a:p>
-            <a:pPr algn="ctr" indent="0" marL="0">
+            <a:pPr marL="0" indent="0" algn="ctr">
               <a:lnSpc>
                 <a:spcPct val="102000"/>
               </a:lnSpc>
@@ -13301,7 +13012,7 @@
             <a:endParaRPr lang="en-US" sz="1080" dirty="0"/>
           </a:p>
           <a:p>
-            <a:pPr algn="ctr" indent="0" marL="0">
+            <a:pPr marL="0" indent="0" algn="ctr">
               <a:lnSpc>
                 <a:spcPct val="102000"/>
               </a:lnSpc>
@@ -13372,7 +13083,7 @@
             <a:prstDash val="solid"/>
           </a:ln>
           <a:effectLst>
-            <a:outerShdw sx="100000" sy="100000" kx="0" ky="0" algn="bl" rotWithShape="0" blurRad="76200" dist="25400" dir="5400000">
+            <a:outerShdw blurRad="76200" dist="25400" dir="5400000" algn="bl" rotWithShape="0">
               <a:srgbClr val="0B1220">
                 <a:alpha val="18000"/>
               </a:srgbClr>
@@ -13401,7 +13112,7 @@
           <a:bodyPr wrap="square" lIns="0" tIns="0" rIns="0" bIns="0" rtlCol="0" anchor="ctr"/>
           <a:lstStyle/>
           <a:p>
-            <a:pPr algn="ctr" indent="0" marL="0">
+            <a:pPr marL="0" indent="0" algn="ctr">
               <a:lnSpc>
                 <a:spcPct val="102000"/>
               </a:lnSpc>
@@ -13421,7 +13132,7 @@
             <a:endParaRPr lang="en-US" sz="1080" dirty="0"/>
           </a:p>
           <a:p>
-            <a:pPr algn="ctr" indent="0" marL="0">
+            <a:pPr marL="0" indent="0" algn="ctr">
               <a:lnSpc>
                 <a:spcPct val="102000"/>
               </a:lnSpc>
@@ -13492,7 +13203,7 @@
             <a:prstDash val="solid"/>
           </a:ln>
           <a:effectLst>
-            <a:outerShdw sx="100000" sy="100000" kx="0" ky="0" algn="bl" rotWithShape="0" blurRad="76200" dist="25400" dir="5400000">
+            <a:outerShdw blurRad="76200" dist="25400" dir="5400000" algn="bl" rotWithShape="0">
               <a:srgbClr val="0B1220">
                 <a:alpha val="18000"/>
               </a:srgbClr>
@@ -13521,7 +13232,7 @@
           <a:bodyPr wrap="square" lIns="0" tIns="0" rIns="0" bIns="0" rtlCol="0" anchor="ctr"/>
           <a:lstStyle/>
           <a:p>
-            <a:pPr algn="ctr" indent="0" marL="0">
+            <a:pPr marL="0" indent="0" algn="ctr">
               <a:lnSpc>
                 <a:spcPct val="102000"/>
               </a:lnSpc>
@@ -13541,7 +13252,7 @@
             <a:endParaRPr lang="en-US" sz="1080" dirty="0"/>
           </a:p>
           <a:p>
-            <a:pPr algn="ctr" indent="0" marL="0">
+            <a:pPr marL="0" indent="0" algn="ctr">
               <a:lnSpc>
                 <a:spcPct val="102000"/>
               </a:lnSpc>
@@ -13583,7 +13294,7 @@
           <a:bodyPr wrap="square" lIns="0" tIns="0" rIns="0" bIns="0" rtlCol="0" anchor="ctr"/>
           <a:lstStyle/>
           <a:p>
-            <a:pPr indent="0" marL="0">
+            <a:pPr marL="0" indent="0">
               <a:buNone/>
             </a:pPr>
             <a:r>
@@ -13644,7 +13355,7 @@
           <a:bodyPr wrap="square" lIns="0" tIns="0" rIns="0" bIns="0" rtlCol="0" anchor="ctr"/>
           <a:lstStyle/>
           <a:p>
-            <a:pPr algn="ctr" indent="0" marL="0">
+            <a:pPr marL="0" indent="0" algn="ctr">
               <a:buNone/>
             </a:pPr>
             <a:r>
@@ -13683,7 +13394,7 @@
           <a:bodyPr wrap="square" lIns="0" tIns="0" rIns="0" bIns="0" rtlCol="0" anchor="ctr"/>
           <a:lstStyle/>
           <a:p>
-            <a:pPr indent="0" marL="0">
+            <a:pPr marL="0" indent="0">
               <a:buNone/>
             </a:pPr>
             <a:r>
@@ -13744,7 +13455,7 @@
           <a:bodyPr wrap="square" lIns="0" tIns="0" rIns="0" bIns="0" rtlCol="0" anchor="ctr"/>
           <a:lstStyle/>
           <a:p>
-            <a:pPr algn="ctr" indent="0" marL="0">
+            <a:pPr marL="0" indent="0" algn="ctr">
               <a:buNone/>
             </a:pPr>
             <a:r>
@@ -13783,7 +13494,7 @@
           <a:bodyPr wrap="square" lIns="0" tIns="0" rIns="0" bIns="0" rtlCol="0" anchor="ctr"/>
           <a:lstStyle/>
           <a:p>
-            <a:pPr indent="0" marL="0">
+            <a:pPr marL="0" indent="0">
               <a:buNone/>
             </a:pPr>
             <a:r>
@@ -13844,7 +13555,7 @@
           <a:bodyPr wrap="square" lIns="0" tIns="0" rIns="0" bIns="0" rtlCol="0" anchor="ctr"/>
           <a:lstStyle/>
           <a:p>
-            <a:pPr algn="ctr" indent="0" marL="0">
+            <a:pPr marL="0" indent="0" algn="ctr">
               <a:buNone/>
             </a:pPr>
             <a:r>
@@ -13883,7 +13594,7 @@
           <a:bodyPr wrap="square" lIns="0" tIns="0" rIns="0" bIns="0" rtlCol="0" anchor="ctr"/>
           <a:lstStyle/>
           <a:p>
-            <a:pPr indent="0" marL="0">
+            <a:pPr marL="0" indent="0">
               <a:buNone/>
             </a:pPr>
             <a:r>
@@ -13927,7 +13638,7 @@
             <a:prstDash val="solid"/>
           </a:ln>
           <a:effectLst>
-            <a:outerShdw sx="100000" sy="100000" kx="0" ky="0" algn="bl" rotWithShape="0" blurRad="76200" dist="25400" dir="5400000">
+            <a:outerShdw blurRad="76200" dist="25400" dir="5400000" algn="bl" rotWithShape="0">
               <a:srgbClr val="0B1220">
                 <a:alpha val="18000"/>
               </a:srgbClr>
@@ -13956,11 +13667,11 @@
           <a:bodyPr wrap="square" lIns="0" tIns="0" rIns="0" bIns="0" rtlCol="0" anchor="ctr"/>
           <a:lstStyle/>
           <a:p>
-            <a:pPr indent="0" marL="0">
-              <a:buNone/>
-            </a:pPr>
-            <a:r>
-              <a:rPr lang="en-US" sz="1050" b="1" spc="150" kern="0" dirty="0">
+            <a:pPr marL="0" indent="0">
+              <a:buNone/>
+            </a:pPr>
+            <a:r>
+              <a:rPr lang="en-US" sz="1050" b="1" kern="0" spc="150" dirty="0">
                 <a:solidFill>
                   <a:srgbClr val="17C3D6"/>
                 </a:solidFill>
@@ -13995,7 +13706,7 @@
           <a:bodyPr wrap="square" lIns="0" tIns="0" rIns="0" bIns="0" rtlCol="0" anchor="t"/>
           <a:lstStyle/>
           <a:p>
-            <a:pPr indent="0" marL="0">
+            <a:pPr marL="0" indent="0">
               <a:lnSpc>
                 <a:spcPct val="115000"/>
               </a:lnSpc>
@@ -14015,7 +13726,7 @@
             <a:endParaRPr lang="en-US" sz="1150" dirty="0"/>
           </a:p>
           <a:p>
-            <a:pPr indent="0" marL="0">
+            <a:pPr marL="0" indent="0">
               <a:lnSpc>
                 <a:spcPct val="115000"/>
               </a:lnSpc>
@@ -14035,7 +13746,7 @@
             <a:endParaRPr lang="en-US" sz="1150" dirty="0"/>
           </a:p>
           <a:p>
-            <a:pPr indent="0" marL="0">
+            <a:pPr marL="0" indent="0">
               <a:lnSpc>
                 <a:spcPct val="115000"/>
               </a:lnSpc>
@@ -14055,7 +13766,7 @@
             <a:endParaRPr lang="en-US" sz="1150" dirty="0"/>
           </a:p>
           <a:p>
-            <a:pPr indent="0" marL="0">
+            <a:pPr marL="0" indent="0">
               <a:lnSpc>
                 <a:spcPct val="115000"/>
               </a:lnSpc>
@@ -14075,7 +13786,7 @@
             <a:endParaRPr lang="en-US" sz="1150" dirty="0"/>
           </a:p>
           <a:p>
-            <a:pPr indent="0" marL="0">
+            <a:pPr marL="0" indent="0">
               <a:lnSpc>
                 <a:spcPct val="115000"/>
               </a:lnSpc>
@@ -14095,7 +13806,7 @@
             <a:endParaRPr lang="en-US" sz="1150" dirty="0"/>
           </a:p>
           <a:p>
-            <a:pPr indent="0" marL="0">
+            <a:pPr marL="0" indent="0">
               <a:lnSpc>
                 <a:spcPct val="115000"/>
               </a:lnSpc>
@@ -14115,7 +13826,7 @@
             <a:endParaRPr lang="en-US" sz="1150" dirty="0"/>
           </a:p>
           <a:p>
-            <a:pPr indent="0" marL="0">
+            <a:pPr marL="0" indent="0">
               <a:lnSpc>
                 <a:spcPct val="115000"/>
               </a:lnSpc>
@@ -14135,7 +13846,7 @@
             <a:endParaRPr lang="en-US" sz="1150" dirty="0"/>
           </a:p>
           <a:p>
-            <a:pPr indent="0" marL="0">
+            <a:pPr marL="0" indent="0">
               <a:lnSpc>
                 <a:spcPct val="115000"/>
               </a:lnSpc>
@@ -14155,7 +13866,7 @@
             <a:endParaRPr lang="en-US" sz="1150" dirty="0"/>
           </a:p>
           <a:p>
-            <a:pPr indent="0" marL="0">
+            <a:pPr marL="0" indent="0">
               <a:lnSpc>
                 <a:spcPct val="115000"/>
               </a:lnSpc>
@@ -14197,11 +13908,11 @@
           <a:bodyPr wrap="square" lIns="0" tIns="0" rIns="0" bIns="0" rtlCol="0" anchor="ctr"/>
           <a:lstStyle/>
           <a:p>
-            <a:pPr algn="l" indent="0" marL="0">
-              <a:buNone/>
-            </a:pPr>
-            <a:r>
-              <a:rPr lang="en-US" sz="900" spc="100" kern="0" dirty="0">
+            <a:pPr marL="0" indent="0" algn="l">
+              <a:buNone/>
+            </a:pPr>
+            <a:r>
+              <a:rPr lang="en-US" sz="900" kern="0" spc="100" dirty="0">
                 <a:solidFill>
                   <a:srgbClr val="9FB0CC"/>
                 </a:solidFill>
@@ -14236,7 +13947,7 @@
           <a:bodyPr wrap="square" lIns="0" tIns="0" rIns="0" bIns="0" rtlCol="0" anchor="ctr"/>
           <a:lstStyle/>
           <a:p>
-            <a:pPr algn="r" indent="0" marL="0">
+            <a:pPr marL="0" indent="0" algn="r">
               <a:buNone/>
             </a:pPr>
             <a:r>
@@ -14270,6 +13981,7 @@
         <a:solidFill>
           <a:srgbClr val="EAF1FB"/>
         </a:solidFill>
+        <a:effectLst/>
       </p:bgPr>
     </p:bg>
     <p:spTree>
@@ -14307,11 +14019,11 @@
           <a:bodyPr wrap="square" lIns="0" tIns="0" rIns="0" bIns="0" rtlCol="0" anchor="ctr"/>
           <a:lstStyle/>
           <a:p>
-            <a:pPr algn="l" indent="0" marL="0">
-              <a:buNone/>
-            </a:pPr>
-            <a:r>
-              <a:rPr lang="en-US" sz="1100" b="1" spc="200" kern="0" dirty="0">
+            <a:pPr marL="0" indent="0" algn="l">
+              <a:buNone/>
+            </a:pPr>
+            <a:r>
+              <a:rPr lang="en-US" sz="1100" b="1" kern="0" spc="200" dirty="0">
                 <a:solidFill>
                   <a:srgbClr val="0E8FA0"/>
                 </a:solidFill>
@@ -14346,7 +14058,7 @@
           <a:bodyPr wrap="square" lIns="0" tIns="0" rIns="0" bIns="0" rtlCol="0" anchor="ctr"/>
           <a:lstStyle/>
           <a:p>
-            <a:pPr algn="l" indent="0" marL="0">
+            <a:pPr marL="0" indent="0" algn="l">
               <a:buNone/>
             </a:pPr>
             <a:r>
@@ -14390,7 +14102,7 @@
             <a:prstDash val="solid"/>
           </a:ln>
           <a:effectLst>
-            <a:outerShdw sx="100000" sy="100000" kx="0" ky="0" algn="bl" rotWithShape="0" blurRad="76200" dist="25400" dir="5400000">
+            <a:outerShdw blurRad="76200" dist="25400" dir="5400000" algn="bl" rotWithShape="0">
               <a:srgbClr val="0B1220">
                 <a:alpha val="18000"/>
               </a:srgbClr>
@@ -14419,7 +14131,7 @@
           <a:bodyPr wrap="square" lIns="0" tIns="0" rIns="0" bIns="0" rtlCol="0" anchor="ctr"/>
           <a:lstStyle/>
           <a:p>
-            <a:pPr algn="ctr" indent="0" marL="0">
+            <a:pPr marL="0" indent="0" algn="ctr">
               <a:lnSpc>
                 <a:spcPct val="102000"/>
               </a:lnSpc>
@@ -14490,7 +14202,7 @@
             <a:prstDash val="solid"/>
           </a:ln>
           <a:effectLst>
-            <a:outerShdw sx="100000" sy="100000" kx="0" ky="0" algn="bl" rotWithShape="0" blurRad="76200" dist="25400" dir="5400000">
+            <a:outerShdw blurRad="76200" dist="25400" dir="5400000" algn="bl" rotWithShape="0">
               <a:srgbClr val="0B1220">
                 <a:alpha val="18000"/>
               </a:srgbClr>
@@ -14519,7 +14231,7 @@
           <a:bodyPr wrap="square" lIns="0" tIns="0" rIns="0" bIns="0" rtlCol="0" anchor="ctr"/>
           <a:lstStyle/>
           <a:p>
-            <a:pPr algn="ctr" indent="0" marL="0">
+            <a:pPr marL="0" indent="0" algn="ctr">
               <a:lnSpc>
                 <a:spcPct val="102000"/>
               </a:lnSpc>
@@ -14607,7 +14319,7 @@
           <a:bodyPr wrap="square" lIns="0" tIns="0" rIns="0" bIns="0" rtlCol="0" anchor="ctr"/>
           <a:lstStyle/>
           <a:p>
-            <a:pPr algn="ctr" indent="0" marL="0">
+            <a:pPr marL="0" indent="0" algn="ctr">
               <a:buNone/>
             </a:pPr>
             <a:r>
@@ -14651,7 +14363,7 @@
             <a:prstDash val="solid"/>
           </a:ln>
           <a:effectLst>
-            <a:outerShdw sx="100000" sy="100000" kx="0" ky="0" algn="bl" rotWithShape="0" blurRad="76200" dist="25400" dir="5400000">
+            <a:outerShdw blurRad="76200" dist="25400" dir="5400000" algn="bl" rotWithShape="0">
               <a:srgbClr val="0B1220">
                 <a:alpha val="18000"/>
               </a:srgbClr>
@@ -14680,7 +14392,7 @@
           <a:bodyPr wrap="square" lIns="0" tIns="0" rIns="0" bIns="0" rtlCol="0" anchor="ctr"/>
           <a:lstStyle/>
           <a:p>
-            <a:pPr indent="0" marL="0">
+            <a:pPr marL="0" indent="0">
               <a:buNone/>
             </a:pPr>
             <a:r>
@@ -14719,7 +14431,7 @@
           <a:bodyPr wrap="square" lIns="0" tIns="0" rIns="0" bIns="0" rtlCol="0" anchor="ctr"/>
           <a:lstStyle/>
           <a:p>
-            <a:pPr indent="0" marL="0">
+            <a:pPr marL="0" indent="0">
               <a:lnSpc>
                 <a:spcPct val="112000"/>
               </a:lnSpc>
@@ -14807,7 +14519,7 @@
           <a:bodyPr wrap="square" lIns="0" tIns="0" rIns="0" bIns="0" rtlCol="0" anchor="ctr"/>
           <a:lstStyle/>
           <a:p>
-            <a:pPr algn="ctr" indent="0" marL="0">
+            <a:pPr marL="0" indent="0" algn="ctr">
               <a:buNone/>
             </a:pPr>
             <a:r>
@@ -14851,7 +14563,7 @@
             <a:prstDash val="solid"/>
           </a:ln>
           <a:effectLst>
-            <a:outerShdw sx="100000" sy="100000" kx="0" ky="0" algn="bl" rotWithShape="0" blurRad="76200" dist="25400" dir="5400000">
+            <a:outerShdw blurRad="76200" dist="25400" dir="5400000" algn="bl" rotWithShape="0">
               <a:srgbClr val="0B1220">
                 <a:alpha val="18000"/>
               </a:srgbClr>
@@ -14880,7 +14592,7 @@
           <a:bodyPr wrap="square" lIns="0" tIns="0" rIns="0" bIns="0" rtlCol="0" anchor="ctr"/>
           <a:lstStyle/>
           <a:p>
-            <a:pPr indent="0" marL="0">
+            <a:pPr marL="0" indent="0">
               <a:buNone/>
             </a:pPr>
             <a:r>
@@ -14919,7 +14631,7 @@
           <a:bodyPr wrap="square" lIns="0" tIns="0" rIns="0" bIns="0" rtlCol="0" anchor="ctr"/>
           <a:lstStyle/>
           <a:p>
-            <a:pPr indent="0" marL="0">
+            <a:pPr marL="0" indent="0">
               <a:lnSpc>
                 <a:spcPct val="112000"/>
               </a:lnSpc>
@@ -15007,7 +14719,7 @@
           <a:bodyPr wrap="square" lIns="0" tIns="0" rIns="0" bIns="0" rtlCol="0" anchor="ctr"/>
           <a:lstStyle/>
           <a:p>
-            <a:pPr algn="ctr" indent="0" marL="0">
+            <a:pPr marL="0" indent="0" algn="ctr">
               <a:buNone/>
             </a:pPr>
             <a:r>
@@ -15051,7 +14763,7 @@
             <a:prstDash val="solid"/>
           </a:ln>
           <a:effectLst>
-            <a:outerShdw sx="100000" sy="100000" kx="0" ky="0" algn="bl" rotWithShape="0" blurRad="76200" dist="25400" dir="5400000">
+            <a:outerShdw blurRad="76200" dist="25400" dir="5400000" algn="bl" rotWithShape="0">
               <a:srgbClr val="0B1220">
                 <a:alpha val="18000"/>
               </a:srgbClr>
@@ -15080,7 +14792,7 @@
           <a:bodyPr wrap="square" lIns="0" tIns="0" rIns="0" bIns="0" rtlCol="0" anchor="ctr"/>
           <a:lstStyle/>
           <a:p>
-            <a:pPr indent="0" marL="0">
+            <a:pPr marL="0" indent="0">
               <a:buNone/>
             </a:pPr>
             <a:r>
@@ -15119,7 +14831,7 @@
           <a:bodyPr wrap="square" lIns="0" tIns="0" rIns="0" bIns="0" rtlCol="0" anchor="ctr"/>
           <a:lstStyle/>
           <a:p>
-            <a:pPr indent="0" marL="0">
+            <a:pPr marL="0" indent="0">
               <a:lnSpc>
                 <a:spcPct val="112000"/>
               </a:lnSpc>
@@ -15166,7 +14878,7 @@
             <a:prstDash val="solid"/>
           </a:ln>
           <a:effectLst>
-            <a:outerShdw sx="100000" sy="100000" kx="0" ky="0" algn="bl" rotWithShape="0" blurRad="76200" dist="25400" dir="5400000">
+            <a:outerShdw blurRad="76200" dist="25400" dir="5400000" algn="bl" rotWithShape="0">
               <a:srgbClr val="0B1220">
                 <a:alpha val="18000"/>
               </a:srgbClr>
@@ -15195,7 +14907,7 @@
           <a:bodyPr wrap="square" lIns="0" tIns="0" rIns="0" bIns="0" rtlCol="0" anchor="ctr"/>
           <a:lstStyle/>
           <a:p>
-            <a:pPr indent="0" marL="0">
+            <a:pPr marL="0" indent="0">
               <a:lnSpc>
                 <a:spcPct val="110000"/>
               </a:lnSpc>
@@ -15212,12 +14924,6 @@
               </a:rPr>
               <a:t>Reasoning trace attached to every action:  </a:t>
             </a:r>
-            <a:pPr indent="0" marL="0">
-              <a:lnSpc>
-                <a:spcPct val="110000"/>
-              </a:lnSpc>
-              <a:buNone/>
-            </a:pPr>
             <a:r>
               <a:rPr lang="en-US" sz="1150" i="1" dirty="0">
                 <a:solidFill>
@@ -15254,11 +14960,11 @@
           <a:bodyPr wrap="square" lIns="0" tIns="0" rIns="0" bIns="0" rtlCol="0" anchor="ctr"/>
           <a:lstStyle/>
           <a:p>
-            <a:pPr algn="l" indent="0" marL="0">
-              <a:buNone/>
-            </a:pPr>
-            <a:r>
-              <a:rPr lang="en-US" sz="900" spc="100" kern="0" dirty="0">
+            <a:pPr marL="0" indent="0" algn="l">
+              <a:buNone/>
+            </a:pPr>
+            <a:r>
+              <a:rPr lang="en-US" sz="900" kern="0" spc="100" dirty="0">
                 <a:solidFill>
                   <a:srgbClr val="5B6B85"/>
                 </a:solidFill>
@@ -15293,7 +14999,7 @@
           <a:bodyPr wrap="square" lIns="0" tIns="0" rIns="0" bIns="0" rtlCol="0" anchor="ctr"/>
           <a:lstStyle/>
           <a:p>
-            <a:pPr algn="r" indent="0" marL="0">
+            <a:pPr marL="0" indent="0" algn="r">
               <a:buNone/>
             </a:pPr>
             <a:r>
@@ -15327,6 +15033,7 @@
         <a:solidFill>
           <a:srgbClr val="0B1220"/>
         </a:solidFill>
+        <a:effectLst/>
       </p:bgPr>
     </p:bg>
     <p:spTree>
@@ -15364,11 +15071,11 @@
           <a:bodyPr wrap="square" lIns="0" tIns="0" rIns="0" bIns="0" rtlCol="0" anchor="ctr"/>
           <a:lstStyle/>
           <a:p>
-            <a:pPr algn="l" indent="0" marL="0">
-              <a:buNone/>
-            </a:pPr>
-            <a:r>
-              <a:rPr lang="en-US" sz="1100" b="1" spc="200" kern="0" dirty="0">
+            <a:pPr marL="0" indent="0" algn="l">
+              <a:buNone/>
+            </a:pPr>
+            <a:r>
+              <a:rPr lang="en-US" sz="1100" b="1" kern="0" spc="200" dirty="0">
                 <a:solidFill>
                   <a:srgbClr val="17C3D6"/>
                 </a:solidFill>
@@ -15403,7 +15110,7 @@
           <a:bodyPr wrap="square" lIns="0" tIns="0" rIns="0" bIns="0" rtlCol="0" anchor="ctr"/>
           <a:lstStyle/>
           <a:p>
-            <a:pPr algn="l" indent="0" marL="0">
+            <a:pPr marL="0" indent="0" algn="l">
               <a:buNone/>
             </a:pPr>
             <a:r>
@@ -15447,7 +15154,7 @@
             <a:prstDash val="solid"/>
           </a:ln>
           <a:effectLst>
-            <a:outerShdw sx="100000" sy="100000" kx="0" ky="0" algn="bl" rotWithShape="0" blurRad="76200" dist="25400" dir="5400000">
+            <a:outerShdw blurRad="76200" dist="25400" dir="5400000" algn="bl" rotWithShape="0">
               <a:srgbClr val="0B1220">
                 <a:alpha val="18000"/>
               </a:srgbClr>
@@ -15678,7 +15385,7 @@
           <a:bodyPr wrap="square" lIns="0" tIns="0" rIns="0" bIns="0" rtlCol="0" anchor="ctr"/>
           <a:lstStyle/>
           <a:p>
-            <a:pPr algn="ctr" indent="0" marL="0">
+            <a:pPr marL="0" indent="0" algn="ctr">
               <a:buNone/>
             </a:pPr>
             <a:r>
@@ -15742,7 +15449,7 @@
           <a:bodyPr wrap="square" lIns="0" tIns="0" rIns="0" bIns="0" rtlCol="0" anchor="ctr"/>
           <a:lstStyle/>
           <a:p>
-            <a:pPr algn="ctr" indent="0" marL="0">
+            <a:pPr marL="0" indent="0" algn="ctr">
               <a:buNone/>
             </a:pPr>
             <a:r>
@@ -15806,7 +15513,7 @@
           <a:bodyPr wrap="square" lIns="0" tIns="0" rIns="0" bIns="0" rtlCol="0" anchor="ctr"/>
           <a:lstStyle/>
           <a:p>
-            <a:pPr algn="ctr" indent="0" marL="0">
+            <a:pPr marL="0" indent="0" algn="ctr">
               <a:buNone/>
             </a:pPr>
             <a:r>
@@ -15870,7 +15577,7 @@
           <a:bodyPr wrap="square" lIns="0" tIns="0" rIns="0" bIns="0" rtlCol="0" anchor="ctr"/>
           <a:lstStyle/>
           <a:p>
-            <a:pPr algn="ctr" indent="0" marL="0">
+            <a:pPr marL="0" indent="0" algn="ctr">
               <a:buNone/>
             </a:pPr>
             <a:r>
@@ -15914,7 +15621,7 @@
             <a:prstDash val="solid"/>
           </a:ln>
           <a:effectLst>
-            <a:outerShdw sx="100000" sy="100000" kx="0" ky="0" algn="bl" rotWithShape="0" blurRad="76200" dist="25400" dir="5400000">
+            <a:outerShdw blurRad="76200" dist="25400" dir="5400000" algn="bl" rotWithShape="0">
               <a:srgbClr val="0B1220">
                 <a:alpha val="18000"/>
               </a:srgbClr>
@@ -15943,7 +15650,7 @@
           <a:bodyPr wrap="square" lIns="0" tIns="0" rIns="0" bIns="0" rtlCol="0" anchor="ctr"/>
           <a:lstStyle/>
           <a:p>
-            <a:pPr algn="ctr" indent="0" marL="0">
+            <a:pPr marL="0" indent="0" algn="ctr">
               <a:lnSpc>
                 <a:spcPct val="102000"/>
               </a:lnSpc>
@@ -15985,11 +15692,11 @@
           <a:bodyPr wrap="square" lIns="0" tIns="0" rIns="0" bIns="0" rtlCol="0" anchor="ctr"/>
           <a:lstStyle/>
           <a:p>
-            <a:pPr indent="0" marL="0">
-              <a:buNone/>
-            </a:pPr>
-            <a:r>
-              <a:rPr lang="en-US" sz="1100" b="1" spc="150" kern="0" dirty="0">
+            <a:pPr marL="0" indent="0">
+              <a:buNone/>
+            </a:pPr>
+            <a:r>
+              <a:rPr lang="en-US" sz="1100" b="1" kern="0" spc="150" dirty="0">
                 <a:solidFill>
                   <a:srgbClr val="17C3D6"/>
                 </a:solidFill>
@@ -16044,7 +15751,7 @@
           <a:bodyPr wrap="square" lIns="0" tIns="0" rIns="0" bIns="0" rtlCol="0" anchor="ctr"/>
           <a:lstStyle/>
           <a:p>
-            <a:pPr algn="ctr" indent="0" marL="0">
+            <a:pPr marL="0" indent="0" algn="ctr">
               <a:buNone/>
             </a:pPr>
             <a:r>
@@ -16083,7 +15790,7 @@
           <a:bodyPr wrap="square" lIns="0" tIns="0" rIns="0" bIns="0" rtlCol="0" anchor="ctr"/>
           <a:lstStyle/>
           <a:p>
-            <a:pPr indent="0" marL="0">
+            <a:pPr marL="0" indent="0">
               <a:buNone/>
             </a:pPr>
             <a:r>
@@ -16122,7 +15829,7 @@
           <a:bodyPr wrap="square" lIns="0" tIns="0" rIns="0" bIns="0" rtlCol="0" anchor="ctr"/>
           <a:lstStyle/>
           <a:p>
-            <a:pPr indent="0" marL="0">
+            <a:pPr marL="0" indent="0">
               <a:lnSpc>
                 <a:spcPct val="110000"/>
               </a:lnSpc>
@@ -16184,7 +15891,7 @@
           <a:bodyPr wrap="square" lIns="0" tIns="0" rIns="0" bIns="0" rtlCol="0" anchor="ctr"/>
           <a:lstStyle/>
           <a:p>
-            <a:pPr algn="ctr" indent="0" marL="0">
+            <a:pPr marL="0" indent="0" algn="ctr">
               <a:buNone/>
             </a:pPr>
             <a:r>
@@ -16223,7 +15930,7 @@
           <a:bodyPr wrap="square" lIns="0" tIns="0" rIns="0" bIns="0" rtlCol="0" anchor="ctr"/>
           <a:lstStyle/>
           <a:p>
-            <a:pPr indent="0" marL="0">
+            <a:pPr marL="0" indent="0">
               <a:buNone/>
             </a:pPr>
             <a:r>
@@ -16262,7 +15969,7 @@
           <a:bodyPr wrap="square" lIns="0" tIns="0" rIns="0" bIns="0" rtlCol="0" anchor="ctr"/>
           <a:lstStyle/>
           <a:p>
-            <a:pPr indent="0" marL="0">
+            <a:pPr marL="0" indent="0">
               <a:lnSpc>
                 <a:spcPct val="110000"/>
               </a:lnSpc>
@@ -16324,7 +16031,7 @@
           <a:bodyPr wrap="square" lIns="0" tIns="0" rIns="0" bIns="0" rtlCol="0" anchor="ctr"/>
           <a:lstStyle/>
           <a:p>
-            <a:pPr algn="ctr" indent="0" marL="0">
+            <a:pPr marL="0" indent="0" algn="ctr">
               <a:buNone/>
             </a:pPr>
             <a:r>
@@ -16363,7 +16070,7 @@
           <a:bodyPr wrap="square" lIns="0" tIns="0" rIns="0" bIns="0" rtlCol="0" anchor="ctr"/>
           <a:lstStyle/>
           <a:p>
-            <a:pPr indent="0" marL="0">
+            <a:pPr marL="0" indent="0">
               <a:buNone/>
             </a:pPr>
             <a:r>
@@ -16402,7 +16109,7 @@
           <a:bodyPr wrap="square" lIns="0" tIns="0" rIns="0" bIns="0" rtlCol="0" anchor="ctr"/>
           <a:lstStyle/>
           <a:p>
-            <a:pPr indent="0" marL="0">
+            <a:pPr marL="0" indent="0">
               <a:lnSpc>
                 <a:spcPct val="110000"/>
               </a:lnSpc>
@@ -16464,7 +16171,7 @@
           <a:bodyPr wrap="square" lIns="0" tIns="0" rIns="0" bIns="0" rtlCol="0" anchor="ctr"/>
           <a:lstStyle/>
           <a:p>
-            <a:pPr algn="ctr" indent="0" marL="0">
+            <a:pPr marL="0" indent="0" algn="ctr">
               <a:buNone/>
             </a:pPr>
             <a:r>
@@ -16503,7 +16210,7 @@
           <a:bodyPr wrap="square" lIns="0" tIns="0" rIns="0" bIns="0" rtlCol="0" anchor="ctr"/>
           <a:lstStyle/>
           <a:p>
-            <a:pPr indent="0" marL="0">
+            <a:pPr marL="0" indent="0">
               <a:buNone/>
             </a:pPr>
             <a:r>
@@ -16542,7 +16249,7 @@
           <a:bodyPr wrap="square" lIns="0" tIns="0" rIns="0" bIns="0" rtlCol="0" anchor="ctr"/>
           <a:lstStyle/>
           <a:p>
-            <a:pPr indent="0" marL="0">
+            <a:pPr marL="0" indent="0">
               <a:lnSpc>
                 <a:spcPct val="110000"/>
               </a:lnSpc>
@@ -16604,7 +16311,7 @@
           <a:bodyPr wrap="square" lIns="0" tIns="0" rIns="0" bIns="0" rtlCol="0" anchor="ctr"/>
           <a:lstStyle/>
           <a:p>
-            <a:pPr algn="ctr" indent="0" marL="0">
+            <a:pPr marL="0" indent="0" algn="ctr">
               <a:buNone/>
             </a:pPr>
             <a:r>
@@ -16643,7 +16350,7 @@
           <a:bodyPr wrap="square" lIns="0" tIns="0" rIns="0" bIns="0" rtlCol="0" anchor="ctr"/>
           <a:lstStyle/>
           <a:p>
-            <a:pPr indent="0" marL="0">
+            <a:pPr marL="0" indent="0">
               <a:buNone/>
             </a:pPr>
             <a:r>
@@ -16682,7 +16389,7 @@
           <a:bodyPr wrap="square" lIns="0" tIns="0" rIns="0" bIns="0" rtlCol="0" anchor="ctr"/>
           <a:lstStyle/>
           <a:p>
-            <a:pPr indent="0" marL="0">
+            <a:pPr marL="0" indent="0">
               <a:lnSpc>
                 <a:spcPct val="110000"/>
               </a:lnSpc>
@@ -16724,11 +16431,11 @@
           <a:bodyPr wrap="square" lIns="0" tIns="0" rIns="0" bIns="0" rtlCol="0" anchor="ctr"/>
           <a:lstStyle/>
           <a:p>
-            <a:pPr algn="l" indent="0" marL="0">
-              <a:buNone/>
-            </a:pPr>
-            <a:r>
-              <a:rPr lang="en-US" sz="900" spc="100" kern="0" dirty="0">
+            <a:pPr marL="0" indent="0" algn="l">
+              <a:buNone/>
+            </a:pPr>
+            <a:r>
+              <a:rPr lang="en-US" sz="900" kern="0" spc="100" dirty="0">
                 <a:solidFill>
                   <a:srgbClr val="5B6B85"/>
                 </a:solidFill>
@@ -16763,7 +16470,7 @@
           <a:bodyPr wrap="square" lIns="0" tIns="0" rIns="0" bIns="0" rtlCol="0" anchor="ctr"/>
           <a:lstStyle/>
           <a:p>
-            <a:pPr algn="r" indent="0" marL="0">
+            <a:pPr marL="0" indent="0" algn="r">
               <a:buNone/>
             </a:pPr>
             <a:r>
@@ -16797,6 +16504,7 @@
         <a:solidFill>
           <a:srgbClr val="FFFFFF"/>
         </a:solidFill>
+        <a:effectLst/>
       </p:bgPr>
     </p:bg>
     <p:spTree>
@@ -16834,11 +16542,11 @@
           <a:bodyPr wrap="square" lIns="0" tIns="0" rIns="0" bIns="0" rtlCol="0" anchor="ctr"/>
           <a:lstStyle/>
           <a:p>
-            <a:pPr algn="l" indent="0" marL="0">
-              <a:buNone/>
-            </a:pPr>
-            <a:r>
-              <a:rPr lang="en-US" sz="1100" b="1" spc="200" kern="0" dirty="0">
+            <a:pPr marL="0" indent="0" algn="l">
+              <a:buNone/>
+            </a:pPr>
+            <a:r>
+              <a:rPr lang="en-US" sz="1100" b="1" kern="0" spc="200" dirty="0">
                 <a:solidFill>
                   <a:srgbClr val="0E8FA0"/>
                 </a:solidFill>
@@ -16873,7 +16581,7 @@
           <a:bodyPr wrap="square" lIns="0" tIns="0" rIns="0" bIns="0" rtlCol="0" anchor="ctr"/>
           <a:lstStyle/>
           <a:p>
-            <a:pPr algn="l" indent="0" marL="0">
+            <a:pPr marL="0" indent="0" algn="l">
               <a:buNone/>
             </a:pPr>
             <a:r>
@@ -16917,7 +16625,7 @@
             <a:prstDash val="solid"/>
           </a:ln>
           <a:effectLst>
-            <a:outerShdw sx="100000" sy="100000" kx="0" ky="0" algn="bl" rotWithShape="0" blurRad="76200" dist="25400" dir="5400000">
+            <a:outerShdw blurRad="76200" dist="25400" dir="5400000" algn="bl" rotWithShape="0">
               <a:srgbClr val="0B1220">
                 <a:alpha val="18000"/>
               </a:srgbClr>
@@ -16966,11 +16674,11 @@
           <a:bodyPr wrap="square" lIns="0" tIns="0" rIns="0" bIns="0" rtlCol="0" anchor="ctr"/>
           <a:lstStyle/>
           <a:p>
-            <a:pPr indent="0" marL="0">
-              <a:buNone/>
-            </a:pPr>
-            <a:r>
-              <a:rPr lang="en-US" sz="1000" b="1" spc="100" kern="0" dirty="0">
+            <a:pPr marL="0" indent="0">
+              <a:buNone/>
+            </a:pPr>
+            <a:r>
+              <a:rPr lang="en-US" sz="1000" b="1" kern="0" spc="100" dirty="0">
                 <a:solidFill>
                   <a:srgbClr val="5B6B85"/>
                 </a:solidFill>
@@ -17005,7 +16713,7 @@
           <a:bodyPr wrap="square" lIns="0" tIns="0" rIns="0" bIns="0" rtlCol="0" anchor="ctr"/>
           <a:lstStyle/>
           <a:p>
-            <a:pPr indent="0" marL="0">
+            <a:pPr marL="0" indent="0">
               <a:buNone/>
             </a:pPr>
             <a:r>
@@ -17044,7 +16752,7 @@
           <a:bodyPr wrap="square" lIns="0" tIns="0" rIns="0" bIns="0" rtlCol="0" anchor="ctr"/>
           <a:lstStyle/>
           <a:p>
-            <a:pPr indent="0" marL="0">
+            <a:pPr marL="0" indent="0">
               <a:lnSpc>
                 <a:spcPct val="115000"/>
               </a:lnSpc>
@@ -17091,7 +16799,7 @@
             <a:prstDash val="solid"/>
           </a:ln>
           <a:effectLst>
-            <a:outerShdw sx="100000" sy="100000" kx="0" ky="0" algn="bl" rotWithShape="0" blurRad="76200" dist="25400" dir="5400000">
+            <a:outerShdw blurRad="76200" dist="25400" dir="5400000" algn="bl" rotWithShape="0">
               <a:srgbClr val="0B1220">
                 <a:alpha val="18000"/>
               </a:srgbClr>
@@ -17140,11 +16848,11 @@
           <a:bodyPr wrap="square" lIns="0" tIns="0" rIns="0" bIns="0" rtlCol="0" anchor="ctr"/>
           <a:lstStyle/>
           <a:p>
-            <a:pPr indent="0" marL="0">
-              <a:buNone/>
-            </a:pPr>
-            <a:r>
-              <a:rPr lang="en-US" sz="1000" b="1" spc="100" kern="0" dirty="0">
+            <a:pPr marL="0" indent="0">
+              <a:buNone/>
+            </a:pPr>
+            <a:r>
+              <a:rPr lang="en-US" sz="1000" b="1" kern="0" spc="100" dirty="0">
                 <a:solidFill>
                   <a:srgbClr val="5B6B85"/>
                 </a:solidFill>
@@ -17179,7 +16887,7 @@
           <a:bodyPr wrap="square" lIns="0" tIns="0" rIns="0" bIns="0" rtlCol="0" anchor="ctr"/>
           <a:lstStyle/>
           <a:p>
-            <a:pPr indent="0" marL="0">
+            <a:pPr marL="0" indent="0">
               <a:buNone/>
             </a:pPr>
             <a:r>
@@ -17218,7 +16926,7 @@
           <a:bodyPr wrap="square" lIns="0" tIns="0" rIns="0" bIns="0" rtlCol="0" anchor="ctr"/>
           <a:lstStyle/>
           <a:p>
-            <a:pPr indent="0" marL="0">
+            <a:pPr marL="0" indent="0">
               <a:lnSpc>
                 <a:spcPct val="115000"/>
               </a:lnSpc>
@@ -17265,7 +16973,7 @@
             <a:prstDash val="solid"/>
           </a:ln>
           <a:effectLst>
-            <a:outerShdw sx="100000" sy="100000" kx="0" ky="0" algn="bl" rotWithShape="0" blurRad="76200" dist="25400" dir="5400000">
+            <a:outerShdw blurRad="76200" dist="25400" dir="5400000" algn="bl" rotWithShape="0">
               <a:srgbClr val="0B1220">
                 <a:alpha val="18000"/>
               </a:srgbClr>
@@ -17314,11 +17022,11 @@
           <a:bodyPr wrap="square" lIns="0" tIns="0" rIns="0" bIns="0" rtlCol="0" anchor="ctr"/>
           <a:lstStyle/>
           <a:p>
-            <a:pPr indent="0" marL="0">
-              <a:buNone/>
-            </a:pPr>
-            <a:r>
-              <a:rPr lang="en-US" sz="1000" b="1" spc="100" kern="0" dirty="0">
+            <a:pPr marL="0" indent="0">
+              <a:buNone/>
+            </a:pPr>
+            <a:r>
+              <a:rPr lang="en-US" sz="1000" b="1" kern="0" spc="100" dirty="0">
                 <a:solidFill>
                   <a:srgbClr val="5B6B85"/>
                 </a:solidFill>
@@ -17353,7 +17061,7 @@
           <a:bodyPr wrap="square" lIns="0" tIns="0" rIns="0" bIns="0" rtlCol="0" anchor="ctr"/>
           <a:lstStyle/>
           <a:p>
-            <a:pPr indent="0" marL="0">
+            <a:pPr marL="0" indent="0">
               <a:buNone/>
             </a:pPr>
             <a:r>
@@ -17392,7 +17100,7 @@
           <a:bodyPr wrap="square" lIns="0" tIns="0" rIns="0" bIns="0" rtlCol="0" anchor="ctr"/>
           <a:lstStyle/>
           <a:p>
-            <a:pPr indent="0" marL="0">
+            <a:pPr marL="0" indent="0">
               <a:lnSpc>
                 <a:spcPct val="115000"/>
               </a:lnSpc>
@@ -17439,7 +17147,7 @@
             <a:prstDash val="solid"/>
           </a:ln>
           <a:effectLst>
-            <a:outerShdw sx="100000" sy="100000" kx="0" ky="0" algn="bl" rotWithShape="0" blurRad="76200" dist="25400" dir="5400000">
+            <a:outerShdw blurRad="76200" dist="25400" dir="5400000" algn="bl" rotWithShape="0">
               <a:srgbClr val="0B1220">
                 <a:alpha val="18000"/>
               </a:srgbClr>
@@ -17488,11 +17196,11 @@
           <a:bodyPr wrap="square" lIns="0" tIns="0" rIns="0" bIns="0" rtlCol="0" anchor="ctr"/>
           <a:lstStyle/>
           <a:p>
-            <a:pPr indent="0" marL="0">
-              <a:buNone/>
-            </a:pPr>
-            <a:r>
-              <a:rPr lang="en-US" sz="1000" b="1" spc="100" kern="0" dirty="0">
+            <a:pPr marL="0" indent="0">
+              <a:buNone/>
+            </a:pPr>
+            <a:r>
+              <a:rPr lang="en-US" sz="1000" b="1" kern="0" spc="100" dirty="0">
                 <a:solidFill>
                   <a:srgbClr val="5B6B85"/>
                 </a:solidFill>
@@ -17527,7 +17235,7 @@
           <a:bodyPr wrap="square" lIns="0" tIns="0" rIns="0" bIns="0" rtlCol="0" anchor="ctr"/>
           <a:lstStyle/>
           <a:p>
-            <a:pPr indent="0" marL="0">
+            <a:pPr marL="0" indent="0">
               <a:buNone/>
             </a:pPr>
             <a:r>
@@ -17566,7 +17274,7 @@
           <a:bodyPr wrap="square" lIns="0" tIns="0" rIns="0" bIns="0" rtlCol="0" anchor="ctr"/>
           <a:lstStyle/>
           <a:p>
-            <a:pPr indent="0" marL="0">
+            <a:pPr marL="0" indent="0">
               <a:lnSpc>
                 <a:spcPct val="115000"/>
               </a:lnSpc>
@@ -17608,7 +17316,7 @@
           <a:bodyPr wrap="square" lIns="0" tIns="0" rIns="0" bIns="0" rtlCol="0" anchor="ctr"/>
           <a:lstStyle/>
           <a:p>
-            <a:pPr indent="0" marL="0">
+            <a:pPr marL="0" indent="0">
               <a:buNone/>
             </a:pPr>
             <a:r>
@@ -17628,7 +17336,7 @@
       </p:sp>
       <p:graphicFrame>
         <p:nvGraphicFramePr>
-          <p:cNvPr id="9" name="Table 0"/>
+          <p:cNvPr id="25" name="Table 0"/>
           <p:cNvGraphicFramePr>
             <a:graphicFrameLocks noGrp="1"/>
           </p:cNvGraphicFramePr>
@@ -17649,10 +17357,34 @@
             <a:tbl>
               <a:tblPr/>
               <a:tblGrid>
-                <a:gridCol w="1554480"/>
-                <a:gridCol w="2743200"/>
-                <a:gridCol w="1188720"/>
-                <a:gridCol w="1920240"/>
+                <a:gridCol w="1554480">
+                  <a:extLst>
+                    <a:ext uri="{9D8B030D-6E8A-4147-A177-3AD203B41FA5}">
+                      <a16:colId xmlns:a16="http://schemas.microsoft.com/office/drawing/2014/main" val="20000"/>
+                    </a:ext>
+                  </a:extLst>
+                </a:gridCol>
+                <a:gridCol w="2743200">
+                  <a:extLst>
+                    <a:ext uri="{9D8B030D-6E8A-4147-A177-3AD203B41FA5}">
+                      <a16:colId xmlns:a16="http://schemas.microsoft.com/office/drawing/2014/main" val="20001"/>
+                    </a:ext>
+                  </a:extLst>
+                </a:gridCol>
+                <a:gridCol w="1188720">
+                  <a:extLst>
+                    <a:ext uri="{9D8B030D-6E8A-4147-A177-3AD203B41FA5}">
+                      <a16:colId xmlns:a16="http://schemas.microsoft.com/office/drawing/2014/main" val="20002"/>
+                    </a:ext>
+                  </a:extLst>
+                </a:gridCol>
+                <a:gridCol w="1920240">
+                  <a:extLst>
+                    <a:ext uri="{9D8B030D-6E8A-4147-A177-3AD203B41FA5}">
+                      <a16:colId xmlns:a16="http://schemas.microsoft.com/office/drawing/2014/main" val="20003"/>
+                    </a:ext>
+                  </a:extLst>
+                </a:gridCol>
               </a:tblGrid>
               <a:tr h="358140">
                 <a:tc>
@@ -17660,7 +17392,7 @@
                     <a:bodyPr/>
                     <a:lstStyle/>
                     <a:p>
-                      <a:pPr indent="0" marL="0">
+                      <a:pPr marL="0" indent="0">
                         <a:buNone/>
                       </a:pPr>
                       <a:r>
@@ -17681,7 +17413,7 @@
                       </a:endParaRPr>
                     </a:p>
                   </a:txBody>
-                  <a:tcPr marL="91440" marR="91440" marT="45720" marB="45720" anchor="ctr">
+                  <a:tcPr anchor="ctr">
                     <a:lnL w="9525" cap="flat" cmpd="sng" algn="ctr">
                       <a:solidFill>
                         <a:srgbClr val="DCE4F2"/>
@@ -17728,7 +17460,7 @@
                     <a:bodyPr/>
                     <a:lstStyle/>
                     <a:p>
-                      <a:pPr indent="0" marL="0">
+                      <a:pPr marL="0" indent="0">
                         <a:buNone/>
                       </a:pPr>
                       <a:r>
@@ -17749,7 +17481,7 @@
                       </a:endParaRPr>
                     </a:p>
                   </a:txBody>
-                  <a:tcPr marL="91440" marR="91440" marT="45720" marB="45720" anchor="ctr">
+                  <a:tcPr anchor="ctr">
                     <a:lnL w="9525" cap="flat" cmpd="sng" algn="ctr">
                       <a:solidFill>
                         <a:srgbClr val="DCE4F2"/>
@@ -17796,7 +17528,7 @@
                     <a:bodyPr/>
                     <a:lstStyle/>
                     <a:p>
-                      <a:pPr indent="0" marL="0">
+                      <a:pPr marL="0" indent="0">
                         <a:buNone/>
                       </a:pPr>
                       <a:r>
@@ -17817,7 +17549,7 @@
                       </a:endParaRPr>
                     </a:p>
                   </a:txBody>
-                  <a:tcPr marL="91440" marR="91440" marT="45720" marB="45720" anchor="ctr">
+                  <a:tcPr anchor="ctr">
                     <a:lnL w="9525" cap="flat" cmpd="sng" algn="ctr">
                       <a:solidFill>
                         <a:srgbClr val="DCE4F2"/>
@@ -17864,7 +17596,7 @@
                     <a:bodyPr/>
                     <a:lstStyle/>
                     <a:p>
-                      <a:pPr indent="0" marL="0">
+                      <a:pPr marL="0" indent="0">
                         <a:buNone/>
                       </a:pPr>
                       <a:r>
@@ -17885,7 +17617,7 @@
                       </a:endParaRPr>
                     </a:p>
                   </a:txBody>
-                  <a:tcPr marL="91440" marR="91440" marT="45720" marB="45720" anchor="ctr">
+                  <a:tcPr anchor="ctr">
                     <a:lnL w="9525" cap="flat" cmpd="sng" algn="ctr">
                       <a:solidFill>
                         <a:srgbClr val="DCE4F2"/>
@@ -17927,6 +17659,11 @@
                     </a:solidFill>
                   </a:tcPr>
                 </a:tc>
+                <a:extLst>
+                  <a:ext uri="{0D108BD9-81ED-4DB2-BD59-A6C34878D82A}">
+                    <a16:rowId xmlns:a16="http://schemas.microsoft.com/office/drawing/2014/main" val="10000"/>
+                  </a:ext>
+                </a:extLst>
               </a:tr>
               <a:tr h="358140">
                 <a:tc>
@@ -17934,7 +17671,7 @@
                     <a:bodyPr/>
                     <a:lstStyle/>
                     <a:p>
-                      <a:pPr indent="0" marL="0">
+                      <a:pPr marL="0" indent="0">
                         <a:buNone/>
                       </a:pPr>
                       <a:r>
@@ -17955,7 +17692,7 @@
                       </a:endParaRPr>
                     </a:p>
                   </a:txBody>
-                  <a:tcPr marL="91440" marR="91440" marT="45720" marB="45720" anchor="ctr">
+                  <a:tcPr anchor="ctr">
                     <a:lnL w="9525" cap="flat" cmpd="sng" algn="ctr">
                       <a:solidFill>
                         <a:srgbClr val="DCE4F2"/>
@@ -18002,7 +17739,7 @@
                     <a:bodyPr/>
                     <a:lstStyle/>
                     <a:p>
-                      <a:pPr indent="0" marL="0">
+                      <a:pPr marL="0" indent="0">
                         <a:buNone/>
                       </a:pPr>
                       <a:r>
@@ -18023,7 +17760,7 @@
                       </a:endParaRPr>
                     </a:p>
                   </a:txBody>
-                  <a:tcPr marL="91440" marR="91440" marT="45720" marB="45720" anchor="ctr">
+                  <a:tcPr anchor="ctr">
                     <a:lnL w="9525" cap="flat" cmpd="sng" algn="ctr">
                       <a:solidFill>
                         <a:srgbClr val="DCE4F2"/>
@@ -18070,7 +17807,7 @@
                     <a:bodyPr/>
                     <a:lstStyle/>
                     <a:p>
-                      <a:pPr indent="0" marL="0">
+                      <a:pPr marL="0" indent="0">
                         <a:buNone/>
                       </a:pPr>
                       <a:r>
@@ -18091,7 +17828,7 @@
                       </a:endParaRPr>
                     </a:p>
                   </a:txBody>
-                  <a:tcPr marL="91440" marR="91440" marT="45720" marB="45720" anchor="ctr">
+                  <a:tcPr anchor="ctr">
                     <a:lnL w="9525" cap="flat" cmpd="sng" algn="ctr">
                       <a:solidFill>
                         <a:srgbClr val="DCE4F2"/>
@@ -18138,7 +17875,7 @@
                     <a:bodyPr/>
                     <a:lstStyle/>
                     <a:p>
-                      <a:pPr indent="0" marL="0">
+                      <a:pPr marL="0" indent="0">
                         <a:buNone/>
                       </a:pPr>
                       <a:r>
@@ -18159,7 +17896,7 @@
                       </a:endParaRPr>
                     </a:p>
                   </a:txBody>
-                  <a:tcPr marL="91440" marR="91440" marT="45720" marB="45720" anchor="ctr">
+                  <a:tcPr anchor="ctr">
                     <a:lnL w="9525" cap="flat" cmpd="sng" algn="ctr">
                       <a:solidFill>
                         <a:srgbClr val="DCE4F2"/>
@@ -18201,6 +17938,11 @@
                     </a:solidFill>
                   </a:tcPr>
                 </a:tc>
+                <a:extLst>
+                  <a:ext uri="{0D108BD9-81ED-4DB2-BD59-A6C34878D82A}">
+                    <a16:rowId xmlns:a16="http://schemas.microsoft.com/office/drawing/2014/main" val="10001"/>
+                  </a:ext>
+                </a:extLst>
               </a:tr>
               <a:tr h="358140">
                 <a:tc>
@@ -18208,7 +17950,7 @@
                     <a:bodyPr/>
                     <a:lstStyle/>
                     <a:p>
-                      <a:pPr indent="0" marL="0">
+                      <a:pPr marL="0" indent="0">
                         <a:buNone/>
                       </a:pPr>
                       <a:r>
@@ -18229,7 +17971,7 @@
                       </a:endParaRPr>
                     </a:p>
                   </a:txBody>
-                  <a:tcPr marL="91440" marR="91440" marT="45720" marB="45720" anchor="ctr">
+                  <a:tcPr anchor="ctr">
                     <a:lnL w="9525" cap="flat" cmpd="sng" algn="ctr">
                       <a:solidFill>
                         <a:srgbClr val="DCE4F2"/>
@@ -18276,7 +18018,7 @@
                     <a:bodyPr/>
                     <a:lstStyle/>
                     <a:p>
-                      <a:pPr indent="0" marL="0">
+                      <a:pPr marL="0" indent="0">
                         <a:buNone/>
                       </a:pPr>
                       <a:r>
@@ -18297,7 +18039,7 @@
                       </a:endParaRPr>
                     </a:p>
                   </a:txBody>
-                  <a:tcPr marL="91440" marR="91440" marT="45720" marB="45720" anchor="ctr">
+                  <a:tcPr anchor="ctr">
                     <a:lnL w="9525" cap="flat" cmpd="sng" algn="ctr">
                       <a:solidFill>
                         <a:srgbClr val="DCE4F2"/>
@@ -18344,7 +18086,7 @@
                     <a:bodyPr/>
                     <a:lstStyle/>
                     <a:p>
-                      <a:pPr indent="0" marL="0">
+                      <a:pPr marL="0" indent="0">
                         <a:buNone/>
                       </a:pPr>
                       <a:r>
@@ -18365,7 +18107,7 @@
                       </a:endParaRPr>
                     </a:p>
                   </a:txBody>
-                  <a:tcPr marL="91440" marR="91440" marT="45720" marB="45720" anchor="ctr">
+                  <a:tcPr anchor="ctr">
                     <a:lnL w="9525" cap="flat" cmpd="sng" algn="ctr">
                       <a:solidFill>
                         <a:srgbClr val="DCE4F2"/>
@@ -18412,7 +18154,7 @@
                     <a:bodyPr/>
                     <a:lstStyle/>
                     <a:p>
-                      <a:pPr indent="0" marL="0">
+                      <a:pPr marL="0" indent="0">
                         <a:buNone/>
                       </a:pPr>
                       <a:r>
@@ -18433,7 +18175,7 @@
                       </a:endParaRPr>
                     </a:p>
                   </a:txBody>
-                  <a:tcPr marL="91440" marR="91440" marT="45720" marB="45720" anchor="ctr">
+                  <a:tcPr anchor="ctr">
                     <a:lnL w="9525" cap="flat" cmpd="sng" algn="ctr">
                       <a:solidFill>
                         <a:srgbClr val="DCE4F2"/>
@@ -18475,6 +18217,11 @@
                     </a:solidFill>
                   </a:tcPr>
                 </a:tc>
+                <a:extLst>
+                  <a:ext uri="{0D108BD9-81ED-4DB2-BD59-A6C34878D82A}">
+                    <a16:rowId xmlns:a16="http://schemas.microsoft.com/office/drawing/2014/main" val="10002"/>
+                  </a:ext>
+                </a:extLst>
               </a:tr>
               <a:tr h="358140">
                 <a:tc>
@@ -18482,7 +18229,7 @@
                     <a:bodyPr/>
                     <a:lstStyle/>
                     <a:p>
-                      <a:pPr indent="0" marL="0">
+                      <a:pPr marL="0" indent="0">
                         <a:buNone/>
                       </a:pPr>
                       <a:r>
@@ -18503,7 +18250,7 @@
                       </a:endParaRPr>
                     </a:p>
                   </a:txBody>
-                  <a:tcPr marL="91440" marR="91440" marT="45720" marB="45720" anchor="ctr">
+                  <a:tcPr anchor="ctr">
                     <a:lnL w="9525" cap="flat" cmpd="sng" algn="ctr">
                       <a:solidFill>
                         <a:srgbClr val="DCE4F2"/>
@@ -18550,7 +18297,7 @@
                     <a:bodyPr/>
                     <a:lstStyle/>
                     <a:p>
-                      <a:pPr indent="0" marL="0">
+                      <a:pPr marL="0" indent="0">
                         <a:buNone/>
                       </a:pPr>
                       <a:r>
@@ -18571,7 +18318,7 @@
                       </a:endParaRPr>
                     </a:p>
                   </a:txBody>
-                  <a:tcPr marL="91440" marR="91440" marT="45720" marB="45720" anchor="ctr">
+                  <a:tcPr anchor="ctr">
                     <a:lnL w="9525" cap="flat" cmpd="sng" algn="ctr">
                       <a:solidFill>
                         <a:srgbClr val="DCE4F2"/>
@@ -18618,7 +18365,7 @@
                     <a:bodyPr/>
                     <a:lstStyle/>
                     <a:p>
-                      <a:pPr indent="0" marL="0">
+                      <a:pPr marL="0" indent="0">
                         <a:buNone/>
                       </a:pPr>
                       <a:r>
@@ -18639,7 +18386,7 @@
                       </a:endParaRPr>
                     </a:p>
                   </a:txBody>
-                  <a:tcPr marL="91440" marR="91440" marT="45720" marB="45720" anchor="ctr">
+                  <a:tcPr anchor="ctr">
                     <a:lnL w="9525" cap="flat" cmpd="sng" algn="ctr">
                       <a:solidFill>
                         <a:srgbClr val="DCE4F2"/>
@@ -18686,7 +18433,7 @@
                     <a:bodyPr/>
                     <a:lstStyle/>
                     <a:p>
-                      <a:pPr indent="0" marL="0">
+                      <a:pPr marL="0" indent="0">
                         <a:buNone/>
                       </a:pPr>
                       <a:r>
@@ -18707,7 +18454,7 @@
                       </a:endParaRPr>
                     </a:p>
                   </a:txBody>
-                  <a:tcPr marL="91440" marR="91440" marT="45720" marB="45720" anchor="ctr">
+                  <a:tcPr anchor="ctr">
                     <a:lnL w="9525" cap="flat" cmpd="sng" algn="ctr">
                       <a:solidFill>
                         <a:srgbClr val="DCE4F2"/>
@@ -18749,6 +18496,11 @@
                     </a:solidFill>
                   </a:tcPr>
                 </a:tc>
+                <a:extLst>
+                  <a:ext uri="{0D108BD9-81ED-4DB2-BD59-A6C34878D82A}">
+                    <a16:rowId xmlns:a16="http://schemas.microsoft.com/office/drawing/2014/main" val="10003"/>
+                  </a:ext>
+                </a:extLst>
               </a:tr>
               <a:tr h="358140">
                 <a:tc>
@@ -18756,7 +18508,7 @@
                     <a:bodyPr/>
                     <a:lstStyle/>
                     <a:p>
-                      <a:pPr indent="0" marL="0">
+                      <a:pPr marL="0" indent="0">
                         <a:buNone/>
                       </a:pPr>
                       <a:r>
@@ -18777,7 +18529,7 @@
                       </a:endParaRPr>
                     </a:p>
                   </a:txBody>
-                  <a:tcPr marL="91440" marR="91440" marT="45720" marB="45720" anchor="ctr">
+                  <a:tcPr anchor="ctr">
                     <a:lnL w="9525" cap="flat" cmpd="sng" algn="ctr">
                       <a:solidFill>
                         <a:srgbClr val="DCE4F2"/>
@@ -18824,7 +18576,7 @@
                     <a:bodyPr/>
                     <a:lstStyle/>
                     <a:p>
-                      <a:pPr indent="0" marL="0">
+                      <a:pPr marL="0" indent="0">
                         <a:buNone/>
                       </a:pPr>
                       <a:r>
@@ -18845,7 +18597,7 @@
                       </a:endParaRPr>
                     </a:p>
                   </a:txBody>
-                  <a:tcPr marL="91440" marR="91440" marT="45720" marB="45720" anchor="ctr">
+                  <a:tcPr anchor="ctr">
                     <a:lnL w="9525" cap="flat" cmpd="sng" algn="ctr">
                       <a:solidFill>
                         <a:srgbClr val="DCE4F2"/>
@@ -18892,7 +18644,7 @@
                     <a:bodyPr/>
                     <a:lstStyle/>
                     <a:p>
-                      <a:pPr indent="0" marL="0">
+                      <a:pPr marL="0" indent="0">
                         <a:buNone/>
                       </a:pPr>
                       <a:r>
@@ -18913,7 +18665,7 @@
                       </a:endParaRPr>
                     </a:p>
                   </a:txBody>
-                  <a:tcPr marL="91440" marR="91440" marT="45720" marB="45720" anchor="ctr">
+                  <a:tcPr anchor="ctr">
                     <a:lnL w="9525" cap="flat" cmpd="sng" algn="ctr">
                       <a:solidFill>
                         <a:srgbClr val="DCE4F2"/>
@@ -18960,7 +18712,7 @@
                     <a:bodyPr/>
                     <a:lstStyle/>
                     <a:p>
-                      <a:pPr indent="0" marL="0">
+                      <a:pPr marL="0" indent="0">
                         <a:buNone/>
                       </a:pPr>
                       <a:r>
@@ -18981,7 +18733,7 @@
                       </a:endParaRPr>
                     </a:p>
                   </a:txBody>
-                  <a:tcPr marL="91440" marR="91440" marT="45720" marB="45720" anchor="ctr">
+                  <a:tcPr anchor="ctr">
                     <a:lnL w="9525" cap="flat" cmpd="sng" algn="ctr">
                       <a:solidFill>
                         <a:srgbClr val="DCE4F2"/>
@@ -19023,6 +18775,11 @@
                     </a:solidFill>
                   </a:tcPr>
                 </a:tc>
+                <a:extLst>
+                  <a:ext uri="{0D108BD9-81ED-4DB2-BD59-A6C34878D82A}">
+                    <a16:rowId xmlns:a16="http://schemas.microsoft.com/office/drawing/2014/main" val="10004"/>
+                  </a:ext>
+                </a:extLst>
               </a:tr>
               <a:tr h="358140">
                 <a:tc>
@@ -19030,7 +18787,7 @@
                     <a:bodyPr/>
                     <a:lstStyle/>
                     <a:p>
-                      <a:pPr indent="0" marL="0">
+                      <a:pPr marL="0" indent="0">
                         <a:buNone/>
                       </a:pPr>
                       <a:r>
@@ -19051,7 +18808,7 @@
                       </a:endParaRPr>
                     </a:p>
                   </a:txBody>
-                  <a:tcPr marL="91440" marR="91440" marT="45720" marB="45720" anchor="ctr">
+                  <a:tcPr anchor="ctr">
                     <a:lnL w="9525" cap="flat" cmpd="sng" algn="ctr">
                       <a:solidFill>
                         <a:srgbClr val="DCE4F2"/>
@@ -19098,7 +18855,7 @@
                     <a:bodyPr/>
                     <a:lstStyle/>
                     <a:p>
-                      <a:pPr indent="0" marL="0">
+                      <a:pPr marL="0" indent="0">
                         <a:buNone/>
                       </a:pPr>
                       <a:r>
@@ -19119,7 +18876,7 @@
                       </a:endParaRPr>
                     </a:p>
                   </a:txBody>
-                  <a:tcPr marL="91440" marR="91440" marT="45720" marB="45720" anchor="ctr">
+                  <a:tcPr anchor="ctr">
                     <a:lnL w="9525" cap="flat" cmpd="sng" algn="ctr">
                       <a:solidFill>
                         <a:srgbClr val="DCE4F2"/>
@@ -19166,7 +18923,7 @@
                     <a:bodyPr/>
                     <a:lstStyle/>
                     <a:p>
-                      <a:pPr indent="0" marL="0">
+                      <a:pPr marL="0" indent="0">
                         <a:buNone/>
                       </a:pPr>
                       <a:r>
@@ -19187,7 +18944,7 @@
                       </a:endParaRPr>
                     </a:p>
                   </a:txBody>
-                  <a:tcPr marL="91440" marR="91440" marT="45720" marB="45720" anchor="ctr">
+                  <a:tcPr anchor="ctr">
                     <a:lnL w="9525" cap="flat" cmpd="sng" algn="ctr">
                       <a:solidFill>
                         <a:srgbClr val="DCE4F2"/>
@@ -19234,7 +18991,7 @@
                     <a:bodyPr/>
                     <a:lstStyle/>
                     <a:p>
-                      <a:pPr indent="0" marL="0">
+                      <a:pPr marL="0" indent="0">
                         <a:buNone/>
                       </a:pPr>
                       <a:r>
@@ -19255,7 +19012,7 @@
                       </a:endParaRPr>
                     </a:p>
                   </a:txBody>
-                  <a:tcPr marL="91440" marR="91440" marT="45720" marB="45720" anchor="ctr">
+                  <a:tcPr anchor="ctr">
                     <a:lnL w="9525" cap="flat" cmpd="sng" algn="ctr">
                       <a:solidFill>
                         <a:srgbClr val="DCE4F2"/>
@@ -19297,6 +19054,11 @@
                     </a:solidFill>
                   </a:tcPr>
                 </a:tc>
+                <a:extLst>
+                  <a:ext uri="{0D108BD9-81ED-4DB2-BD59-A6C34878D82A}">
+                    <a16:rowId xmlns:a16="http://schemas.microsoft.com/office/drawing/2014/main" val="10005"/>
+                  </a:ext>
+                </a:extLst>
               </a:tr>
             </a:tbl>
           </a:graphicData>
@@ -19328,7 +19090,7 @@
             <a:prstDash val="solid"/>
           </a:ln>
           <a:effectLst>
-            <a:outerShdw sx="100000" sy="100000" kx="0" ky="0" algn="bl" rotWithShape="0" blurRad="76200" dist="25400" dir="5400000">
+            <a:outerShdw blurRad="76200" dist="25400" dir="5400000" algn="bl" rotWithShape="0">
               <a:srgbClr val="0B1220">
                 <a:alpha val="18000"/>
               </a:srgbClr>
@@ -19357,11 +19119,11 @@
           <a:bodyPr wrap="square" lIns="0" tIns="0" rIns="0" bIns="0" rtlCol="0" anchor="ctr"/>
           <a:lstStyle/>
           <a:p>
-            <a:pPr indent="0" marL="0">
-              <a:buNone/>
-            </a:pPr>
-            <a:r>
-              <a:rPr lang="en-US" sz="1050" b="1" spc="150" kern="0" dirty="0">
+            <a:pPr marL="0" indent="0">
+              <a:buNone/>
+            </a:pPr>
+            <a:r>
+              <a:rPr lang="en-US" sz="1050" b="1" kern="0" spc="150" dirty="0">
                 <a:solidFill>
                   <a:srgbClr val="17C3D6"/>
                 </a:solidFill>
@@ -19490,11 +19252,11 @@
           <a:bodyPr wrap="square" lIns="0" tIns="0" rIns="0" bIns="0" rtlCol="0" anchor="ctr"/>
           <a:lstStyle/>
           <a:p>
-            <a:pPr algn="l" indent="0" marL="0">
-              <a:buNone/>
-            </a:pPr>
-            <a:r>
-              <a:rPr lang="en-US" sz="900" spc="100" kern="0" dirty="0">
+            <a:pPr marL="0" indent="0" algn="l">
+              <a:buNone/>
+            </a:pPr>
+            <a:r>
+              <a:rPr lang="en-US" sz="900" kern="0" spc="100" dirty="0">
                 <a:solidFill>
                   <a:srgbClr val="9FB0CC"/>
                 </a:solidFill>
@@ -19529,7 +19291,7 @@
           <a:bodyPr wrap="square" lIns="0" tIns="0" rIns="0" bIns="0" rtlCol="0" anchor="ctr"/>
           <a:lstStyle/>
           <a:p>
-            <a:pPr algn="r" indent="0" marL="0">
+            <a:pPr marL="0" indent="0" algn="r">
               <a:buNone/>
             </a:pPr>
             <a:r>
@@ -19563,6 +19325,7 @@
         <a:solidFill>
           <a:srgbClr val="EAF1FB"/>
         </a:solidFill>
+        <a:effectLst/>
       </p:bgPr>
     </p:bg>
     <p:spTree>
@@ -19600,11 +19363,11 @@
           <a:bodyPr wrap="square" lIns="0" tIns="0" rIns="0" bIns="0" rtlCol="0" anchor="ctr"/>
           <a:lstStyle/>
           <a:p>
-            <a:pPr algn="l" indent="0" marL="0">
-              <a:buNone/>
-            </a:pPr>
-            <a:r>
-              <a:rPr lang="en-US" sz="1100" b="1" spc="200" kern="0" dirty="0">
+            <a:pPr marL="0" indent="0" algn="l">
+              <a:buNone/>
+            </a:pPr>
+            <a:r>
+              <a:rPr lang="en-US" sz="1100" b="1" kern="0" spc="200" dirty="0">
                 <a:solidFill>
                   <a:srgbClr val="0E8FA0"/>
                 </a:solidFill>
@@ -19639,7 +19402,7 @@
           <a:bodyPr wrap="square" lIns="0" tIns="0" rIns="0" bIns="0" rtlCol="0" anchor="ctr"/>
           <a:lstStyle/>
           <a:p>
-            <a:pPr algn="l" indent="0" marL="0">
+            <a:pPr marL="0" indent="0" algn="l">
               <a:buNone/>
             </a:pPr>
             <a:r>
@@ -19678,7 +19441,7 @@
           <a:bodyPr wrap="square" lIns="0" tIns="0" rIns="0" bIns="0" rtlCol="0" anchor="ctr"/>
           <a:lstStyle/>
           <a:p>
-            <a:pPr indent="0" marL="0">
+            <a:pPr marL="0" indent="0">
               <a:buNone/>
             </a:pPr>
             <a:r>
@@ -19722,7 +19485,7 @@
             <a:prstDash val="solid"/>
           </a:ln>
           <a:effectLst>
-            <a:outerShdw sx="100000" sy="100000" kx="0" ky="0" algn="bl" rotWithShape="0" blurRad="76200" dist="25400" dir="5400000">
+            <a:outerShdw blurRad="76200" dist="25400" dir="5400000" algn="bl" rotWithShape="0">
               <a:srgbClr val="0B1220">
                 <a:alpha val="18000"/>
               </a:srgbClr>
@@ -19751,7 +19514,7 @@
           <a:bodyPr wrap="square" lIns="0" tIns="0" rIns="0" bIns="0" rtlCol="0" anchor="ctr"/>
           <a:lstStyle/>
           <a:p>
-            <a:pPr algn="ctr" indent="0" marL="0">
+            <a:pPr marL="0" indent="0" algn="ctr">
               <a:lnSpc>
                 <a:spcPct val="102000"/>
               </a:lnSpc>
@@ -19822,7 +19585,7 @@
             <a:prstDash val="solid"/>
           </a:ln>
           <a:effectLst>
-            <a:outerShdw sx="100000" sy="100000" kx="0" ky="0" algn="bl" rotWithShape="0" blurRad="76200" dist="25400" dir="5400000">
+            <a:outerShdw blurRad="76200" dist="25400" dir="5400000" algn="bl" rotWithShape="0">
               <a:srgbClr val="0B1220">
                 <a:alpha val="18000"/>
               </a:srgbClr>
@@ -19851,7 +19614,7 @@
           <a:bodyPr wrap="square" lIns="0" tIns="0" rIns="0" bIns="0" rtlCol="0" anchor="ctr"/>
           <a:lstStyle/>
           <a:p>
-            <a:pPr algn="ctr" indent="0" marL="0">
+            <a:pPr marL="0" indent="0" algn="ctr">
               <a:lnSpc>
                 <a:spcPct val="102000"/>
               </a:lnSpc>
@@ -19922,7 +19685,7 @@
             <a:prstDash val="solid"/>
           </a:ln>
           <a:effectLst>
-            <a:outerShdw sx="100000" sy="100000" kx="0" ky="0" algn="bl" rotWithShape="0" blurRad="76200" dist="25400" dir="5400000">
+            <a:outerShdw blurRad="76200" dist="25400" dir="5400000" algn="bl" rotWithShape="0">
               <a:srgbClr val="0B1220">
                 <a:alpha val="18000"/>
               </a:srgbClr>
@@ -19951,7 +19714,7 @@
           <a:bodyPr wrap="square" lIns="0" tIns="0" rIns="0" bIns="0" rtlCol="0" anchor="ctr"/>
           <a:lstStyle/>
           <a:p>
-            <a:pPr algn="ctr" indent="0" marL="0">
+            <a:pPr marL="0" indent="0" algn="ctr">
               <a:lnSpc>
                 <a:spcPct val="102000"/>
               </a:lnSpc>
@@ -20022,7 +19785,7 @@
             <a:prstDash val="solid"/>
           </a:ln>
           <a:effectLst>
-            <a:outerShdw sx="100000" sy="100000" kx="0" ky="0" algn="bl" rotWithShape="0" blurRad="76200" dist="25400" dir="5400000">
+            <a:outerShdw blurRad="76200" dist="25400" dir="5400000" algn="bl" rotWithShape="0">
               <a:srgbClr val="0B1220">
                 <a:alpha val="18000"/>
               </a:srgbClr>
@@ -20051,7 +19814,7 @@
           <a:bodyPr wrap="square" lIns="0" tIns="0" rIns="0" bIns="0" rtlCol="0" anchor="ctr"/>
           <a:lstStyle/>
           <a:p>
-            <a:pPr algn="ctr" indent="0" marL="0">
+            <a:pPr marL="0" indent="0" algn="ctr">
               <a:lnSpc>
                 <a:spcPct val="102000"/>
               </a:lnSpc>
@@ -20093,7 +19856,7 @@
           <a:bodyPr wrap="square" lIns="0" tIns="0" rIns="0" bIns="0" rtlCol="0" anchor="ctr"/>
           <a:lstStyle/>
           <a:p>
-            <a:pPr indent="0" marL="0">
+            <a:pPr marL="0" indent="0">
               <a:buNone/>
             </a:pPr>
             <a:r>
@@ -20137,7 +19900,7 @@
             <a:prstDash val="solid"/>
           </a:ln>
           <a:effectLst>
-            <a:outerShdw sx="100000" sy="100000" kx="0" ky="0" algn="bl" rotWithShape="0" blurRad="76200" dist="25400" dir="5400000">
+            <a:outerShdw blurRad="76200" dist="25400" dir="5400000" algn="bl" rotWithShape="0">
               <a:srgbClr val="0B1220">
                 <a:alpha val="18000"/>
               </a:srgbClr>
@@ -20166,7 +19929,7 @@
           <a:bodyPr wrap="square" lIns="0" tIns="0" rIns="0" bIns="0" rtlCol="0" anchor="ctr"/>
           <a:lstStyle/>
           <a:p>
-            <a:pPr algn="ctr" indent="0" marL="0">
+            <a:pPr marL="0" indent="0" algn="ctr">
               <a:lnSpc>
                 <a:spcPct val="102000"/>
               </a:lnSpc>
@@ -20186,7 +19949,7 @@
             <a:endParaRPr lang="en-US" sz="1060" dirty="0"/>
           </a:p>
           <a:p>
-            <a:pPr algn="ctr" indent="0" marL="0">
+            <a:pPr marL="0" indent="0" algn="ctr">
               <a:lnSpc>
                 <a:spcPct val="102000"/>
               </a:lnSpc>
@@ -20257,7 +20020,7 @@
             <a:prstDash val="solid"/>
           </a:ln>
           <a:effectLst>
-            <a:outerShdw sx="100000" sy="100000" kx="0" ky="0" algn="bl" rotWithShape="0" blurRad="76200" dist="25400" dir="5400000">
+            <a:outerShdw blurRad="76200" dist="25400" dir="5400000" algn="bl" rotWithShape="0">
               <a:srgbClr val="0B1220">
                 <a:alpha val="18000"/>
               </a:srgbClr>
@@ -20286,7 +20049,7 @@
           <a:bodyPr wrap="square" lIns="0" tIns="0" rIns="0" bIns="0" rtlCol="0" anchor="ctr"/>
           <a:lstStyle/>
           <a:p>
-            <a:pPr algn="ctr" indent="0" marL="0">
+            <a:pPr marL="0" indent="0" algn="ctr">
               <a:lnSpc>
                 <a:spcPct val="102000"/>
               </a:lnSpc>
@@ -20306,7 +20069,7 @@
             <a:endParaRPr lang="en-US" sz="1060" dirty="0"/>
           </a:p>
           <a:p>
-            <a:pPr algn="ctr" indent="0" marL="0">
+            <a:pPr marL="0" indent="0" algn="ctr">
               <a:lnSpc>
                 <a:spcPct val="102000"/>
               </a:lnSpc>
@@ -20377,7 +20140,7 @@
             <a:prstDash val="solid"/>
           </a:ln>
           <a:effectLst>
-            <a:outerShdw sx="100000" sy="100000" kx="0" ky="0" algn="bl" rotWithShape="0" blurRad="76200" dist="25400" dir="5400000">
+            <a:outerShdw blurRad="76200" dist="25400" dir="5400000" algn="bl" rotWithShape="0">
               <a:srgbClr val="0B1220">
                 <a:alpha val="18000"/>
               </a:srgbClr>
@@ -20406,7 +20169,7 @@
           <a:bodyPr wrap="square" lIns="0" tIns="0" rIns="0" bIns="0" rtlCol="0" anchor="ctr"/>
           <a:lstStyle/>
           <a:p>
-            <a:pPr algn="ctr" indent="0" marL="0">
+            <a:pPr marL="0" indent="0" algn="ctr">
               <a:lnSpc>
                 <a:spcPct val="102000"/>
               </a:lnSpc>
@@ -20426,7 +20189,7 @@
             <a:endParaRPr lang="en-US" sz="1060" dirty="0"/>
           </a:p>
           <a:p>
-            <a:pPr algn="ctr" indent="0" marL="0">
+            <a:pPr marL="0" indent="0" algn="ctr">
               <a:lnSpc>
                 <a:spcPct val="102000"/>
               </a:lnSpc>
@@ -20497,7 +20260,7 @@
             <a:prstDash val="solid"/>
           </a:ln>
           <a:effectLst>
-            <a:outerShdw sx="100000" sy="100000" kx="0" ky="0" algn="bl" rotWithShape="0" blurRad="76200" dist="25400" dir="5400000">
+            <a:outerShdw blurRad="76200" dist="25400" dir="5400000" algn="bl" rotWithShape="0">
               <a:srgbClr val="0B1220">
                 <a:alpha val="18000"/>
               </a:srgbClr>
@@ -20526,7 +20289,7 @@
           <a:bodyPr wrap="square" lIns="0" tIns="0" rIns="0" bIns="0" rtlCol="0" anchor="ctr"/>
           <a:lstStyle/>
           <a:p>
-            <a:pPr algn="ctr" indent="0" marL="0">
+            <a:pPr marL="0" indent="0" algn="ctr">
               <a:lnSpc>
                 <a:spcPct val="102000"/>
               </a:lnSpc>
@@ -20546,7 +20309,7 @@
             <a:endParaRPr lang="en-US" sz="1060" dirty="0"/>
           </a:p>
           <a:p>
-            <a:pPr algn="ctr" indent="0" marL="0">
+            <a:pPr marL="0" indent="0" algn="ctr">
               <a:lnSpc>
                 <a:spcPct val="102000"/>
               </a:lnSpc>
@@ -20593,7 +20356,7 @@
             <a:prstDash val="solid"/>
           </a:ln>
           <a:effectLst>
-            <a:outerShdw sx="100000" sy="100000" kx="0" ky="0" algn="bl" rotWithShape="0" blurRad="76200" dist="25400" dir="5400000">
+            <a:outerShdw blurRad="76200" dist="25400" dir="5400000" algn="bl" rotWithShape="0">
               <a:srgbClr val="0B1220">
                 <a:alpha val="18000"/>
               </a:srgbClr>
@@ -20622,7 +20385,7 @@
           <a:bodyPr wrap="square" lIns="0" tIns="0" rIns="0" bIns="0" rtlCol="0" anchor="ctr"/>
           <a:lstStyle/>
           <a:p>
-            <a:pPr indent="0" marL="0">
+            <a:pPr marL="0" indent="0">
               <a:buNone/>
             </a:pPr>
             <a:r>
@@ -20636,9 +20399,6 @@
               </a:rPr>
               <a:t>Guiding principle:  </a:t>
             </a:r>
-            <a:pPr indent="0" marL="0">
-              <a:buNone/>
-            </a:pPr>
             <a:r>
               <a:rPr lang="en-US" sz="1200" i="1" dirty="0">
                 <a:solidFill>
@@ -20675,11 +20435,11 @@
           <a:bodyPr wrap="square" lIns="0" tIns="0" rIns="0" bIns="0" rtlCol="0" anchor="ctr"/>
           <a:lstStyle/>
           <a:p>
-            <a:pPr algn="l" indent="0" marL="0">
-              <a:buNone/>
-            </a:pPr>
-            <a:r>
-              <a:rPr lang="en-US" sz="900" spc="100" kern="0" dirty="0">
+            <a:pPr marL="0" indent="0" algn="l">
+              <a:buNone/>
+            </a:pPr>
+            <a:r>
+              <a:rPr lang="en-US" sz="900" kern="0" spc="100" dirty="0">
                 <a:solidFill>
                   <a:srgbClr val="9FB0CC"/>
                 </a:solidFill>
@@ -20714,7 +20474,7 @@
           <a:bodyPr wrap="square" lIns="0" tIns="0" rIns="0" bIns="0" rtlCol="0" anchor="ctr"/>
           <a:lstStyle/>
           <a:p>
-            <a:pPr algn="r" indent="0" marL="0">
+            <a:pPr marL="0" indent="0" algn="r">
               <a:buNone/>
             </a:pPr>
             <a:r>
@@ -21033,4 +20793,299 @@
     </a:ext>
   </a:extLst>
 </a:theme>
+</file>
+
+<file path=ppt/theme/theme2.xml><?xml version="1.0" encoding="utf-8"?>
+<a:theme xmlns:a="http://schemas.openxmlformats.org/drawingml/2006/main" name="Office Theme">
+  <a:themeElements>
+    <a:clrScheme name="Office">
+      <a:dk1>
+        <a:sysClr val="windowText" lastClr="000000"/>
+      </a:dk1>
+      <a:lt1>
+        <a:sysClr val="window" lastClr="FFFFFF"/>
+      </a:lt1>
+      <a:dk2>
+        <a:srgbClr val="44546A"/>
+      </a:dk2>
+      <a:lt2>
+        <a:srgbClr val="E7E6E6"/>
+      </a:lt2>
+      <a:accent1>
+        <a:srgbClr val="4472C4"/>
+      </a:accent1>
+      <a:accent2>
+        <a:srgbClr val="ED7D31"/>
+      </a:accent2>
+      <a:accent3>
+        <a:srgbClr val="A5A5A5"/>
+      </a:accent3>
+      <a:accent4>
+        <a:srgbClr val="FFC000"/>
+      </a:accent4>
+      <a:accent5>
+        <a:srgbClr val="5B9BD5"/>
+      </a:accent5>
+      <a:accent6>
+        <a:srgbClr val="70AD47"/>
+      </a:accent6>
+      <a:hlink>
+        <a:srgbClr val="0563C1"/>
+      </a:hlink>
+      <a:folHlink>
+        <a:srgbClr val="954F72"/>
+      </a:folHlink>
+    </a:clrScheme>
+    <a:fontScheme name="Office">
+      <a:majorFont>
+        <a:latin typeface="Calibri Light" panose="020F0302020204030204"/>
+        <a:ea typeface=""/>
+        <a:cs typeface=""/>
+        <a:font script="Jpan" typeface="游ゴシック Light"/>
+        <a:font script="Hang" typeface="맑은 고딕"/>
+        <a:font script="Hans" typeface="等线 Light"/>
+        <a:font script="Hant" typeface="新細明體"/>
+        <a:font script="Arab" typeface="Times New Roman"/>
+        <a:font script="Hebr" typeface="Times New Roman"/>
+        <a:font script="Thai" typeface="Angsana New"/>
+        <a:font script="Ethi" typeface="Nyala"/>
+        <a:font script="Beng" typeface="Vrinda"/>
+        <a:font script="Gujr" typeface="Shruti"/>
+        <a:font script="Khmr" typeface="MoolBoran"/>
+        <a:font script="Knda" typeface="Tunga"/>
+        <a:font script="Guru" typeface="Raavi"/>
+        <a:font script="Cans" typeface="Euphemia"/>
+        <a:font script="Cher" typeface="Plantagenet Cherokee"/>
+        <a:font script="Yiii" typeface="Microsoft Yi Baiti"/>
+        <a:font script="Tibt" typeface="Microsoft Himalaya"/>
+        <a:font script="Thaa" typeface="MV Boli"/>
+        <a:font script="Deva" typeface="Mangal"/>
+        <a:font script="Telu" typeface="Gautami"/>
+        <a:font script="Taml" typeface="Latha"/>
+        <a:font script="Syrc" typeface="Estrangelo Edessa"/>
+        <a:font script="Orya" typeface="Kalinga"/>
+        <a:font script="Mlym" typeface="Kartika"/>
+        <a:font script="Laoo" typeface="DokChampa"/>
+        <a:font script="Sinh" typeface="Iskoola Pota"/>
+        <a:font script="Mong" typeface="Mongolian Baiti"/>
+        <a:font script="Viet" typeface="Times New Roman"/>
+        <a:font script="Uigh" typeface="Microsoft Uighur"/>
+        <a:font script="Geor" typeface="Sylfaen"/>
+        <a:font script="Armn" typeface="Arial"/>
+        <a:font script="Bugi" typeface="Leelawadee UI"/>
+        <a:font script="Bopo" typeface="Microsoft JhengHei"/>
+        <a:font script="Java" typeface="Javanese Text"/>
+        <a:font script="Lisu" typeface="Segoe UI"/>
+        <a:font script="Mymr" typeface="Myanmar Text"/>
+        <a:font script="Nkoo" typeface="Ebrima"/>
+        <a:font script="Olck" typeface="Nirmala UI"/>
+        <a:font script="Osma" typeface="Ebrima"/>
+        <a:font script="Phag" typeface="Phagspa"/>
+        <a:font script="Syrn" typeface="Estrangelo Edessa"/>
+        <a:font script="Syrj" typeface="Estrangelo Edessa"/>
+        <a:font script="Syre" typeface="Estrangelo Edessa"/>
+        <a:font script="Sora" typeface="Nirmala UI"/>
+        <a:font script="Tale" typeface="Microsoft Tai Le"/>
+        <a:font script="Talu" typeface="Microsoft New Tai Lue"/>
+        <a:font script="Tfng" typeface="Ebrima"/>
+      </a:majorFont>
+      <a:minorFont>
+        <a:latin typeface="Calibri" panose="020F0502020204030204"/>
+        <a:ea typeface=""/>
+        <a:cs typeface=""/>
+        <a:font script="Jpan" typeface="游ゴシック"/>
+        <a:font script="Hang" typeface="맑은 고딕"/>
+        <a:font script="Hans" typeface="等线"/>
+        <a:font script="Hant" typeface="新細明體"/>
+        <a:font script="Arab" typeface="Arial"/>
+        <a:font script="Hebr" typeface="Arial"/>
+        <a:font script="Thai" typeface="Cordia New"/>
+        <a:font script="Ethi" typeface="Nyala"/>
+        <a:font script="Beng" typeface="Vrinda"/>
+        <a:font script="Gujr" typeface="Shruti"/>
+        <a:font script="Khmr" typeface="DaunPenh"/>
+        <a:font script="Knda" typeface="Tunga"/>
+        <a:font script="Guru" typeface="Raavi"/>
+        <a:font script="Cans" typeface="Euphemia"/>
+        <a:font script="Cher" typeface="Plantagenet Cherokee"/>
+        <a:font script="Yiii" typeface="Microsoft Yi Baiti"/>
+        <a:font script="Tibt" typeface="Microsoft Himalaya"/>
+        <a:font script="Thaa" typeface="MV Boli"/>
+        <a:font script="Deva" typeface="Mangal"/>
+        <a:font script="Telu" typeface="Gautami"/>
+        <a:font script="Taml" typeface="Latha"/>
+        <a:font script="Syrc" typeface="Estrangelo Edessa"/>
+        <a:font script="Orya" typeface="Kalinga"/>
+        <a:font script="Mlym" typeface="Kartika"/>
+        <a:font script="Laoo" typeface="DokChampa"/>
+        <a:font script="Sinh" typeface="Iskoola Pota"/>
+        <a:font script="Mong" typeface="Mongolian Baiti"/>
+        <a:font script="Viet" typeface="Arial"/>
+        <a:font script="Uigh" typeface="Microsoft Uighur"/>
+        <a:font script="Geor" typeface="Sylfaen"/>
+        <a:font script="Armn" typeface="Arial"/>
+        <a:font script="Bugi" typeface="Leelawadee UI"/>
+        <a:font script="Bopo" typeface="Microsoft JhengHei"/>
+        <a:font script="Java" typeface="Javanese Text"/>
+        <a:font script="Lisu" typeface="Segoe UI"/>
+        <a:font script="Mymr" typeface="Myanmar Text"/>
+        <a:font script="Nkoo" typeface="Ebrima"/>
+        <a:font script="Olck" typeface="Nirmala UI"/>
+        <a:font script="Osma" typeface="Ebrima"/>
+        <a:font script="Phag" typeface="Phagspa"/>
+        <a:font script="Syrn" typeface="Estrangelo Edessa"/>
+        <a:font script="Syrj" typeface="Estrangelo Edessa"/>
+        <a:font script="Syre" typeface="Estrangelo Edessa"/>
+        <a:font script="Sora" typeface="Nirmala UI"/>
+        <a:font script="Tale" typeface="Microsoft Tai Le"/>
+        <a:font script="Talu" typeface="Microsoft New Tai Lue"/>
+        <a:font script="Tfng" typeface="Ebrima"/>
+      </a:minorFont>
+    </a:fontScheme>
+    <a:fmtScheme name="Office">
+      <a:fillStyleLst>
+        <a:solidFill>
+          <a:schemeClr val="phClr"/>
+        </a:solidFill>
+        <a:gradFill rotWithShape="1">
+          <a:gsLst>
+            <a:gs pos="0">
+              <a:schemeClr val="phClr">
+                <a:lumMod val="110000"/>
+                <a:satMod val="105000"/>
+                <a:tint val="67000"/>
+              </a:schemeClr>
+            </a:gs>
+            <a:gs pos="50000">
+              <a:schemeClr val="phClr">
+                <a:lumMod val="105000"/>
+                <a:satMod val="103000"/>
+                <a:tint val="73000"/>
+              </a:schemeClr>
+            </a:gs>
+            <a:gs pos="100000">
+              <a:schemeClr val="phClr">
+                <a:lumMod val="105000"/>
+                <a:satMod val="109000"/>
+                <a:tint val="81000"/>
+              </a:schemeClr>
+            </a:gs>
+          </a:gsLst>
+          <a:lin ang="5400000" scaled="0"/>
+        </a:gradFill>
+        <a:gradFill rotWithShape="1">
+          <a:gsLst>
+            <a:gs pos="0">
+              <a:schemeClr val="phClr">
+                <a:satMod val="103000"/>
+                <a:lumMod val="102000"/>
+                <a:tint val="94000"/>
+              </a:schemeClr>
+            </a:gs>
+            <a:gs pos="50000">
+              <a:schemeClr val="phClr">
+                <a:satMod val="110000"/>
+                <a:lumMod val="100000"/>
+                <a:shade val="100000"/>
+              </a:schemeClr>
+            </a:gs>
+            <a:gs pos="100000">
+              <a:schemeClr val="phClr">
+                <a:lumMod val="99000"/>
+                <a:satMod val="120000"/>
+                <a:shade val="78000"/>
+              </a:schemeClr>
+            </a:gs>
+          </a:gsLst>
+          <a:lin ang="5400000" scaled="0"/>
+        </a:gradFill>
+      </a:fillStyleLst>
+      <a:lnStyleLst>
+        <a:ln w="6350" cap="flat" cmpd="sng" algn="ctr">
+          <a:solidFill>
+            <a:schemeClr val="phClr"/>
+          </a:solidFill>
+          <a:prstDash val="solid"/>
+          <a:miter lim="800000"/>
+        </a:ln>
+        <a:ln w="12700" cap="flat" cmpd="sng" algn="ctr">
+          <a:solidFill>
+            <a:schemeClr val="phClr"/>
+          </a:solidFill>
+          <a:prstDash val="solid"/>
+          <a:miter lim="800000"/>
+        </a:ln>
+        <a:ln w="19050" cap="flat" cmpd="sng" algn="ctr">
+          <a:solidFill>
+            <a:schemeClr val="phClr"/>
+          </a:solidFill>
+          <a:prstDash val="solid"/>
+          <a:miter lim="800000"/>
+        </a:ln>
+      </a:lnStyleLst>
+      <a:effectStyleLst>
+        <a:effectStyle>
+          <a:effectLst/>
+        </a:effectStyle>
+        <a:effectStyle>
+          <a:effectLst/>
+        </a:effectStyle>
+        <a:effectStyle>
+          <a:effectLst>
+            <a:outerShdw blurRad="57150" dist="19050" dir="5400000" algn="ctr" rotWithShape="0">
+              <a:srgbClr val="000000">
+                <a:alpha val="63000"/>
+              </a:srgbClr>
+            </a:outerShdw>
+          </a:effectLst>
+        </a:effectStyle>
+      </a:effectStyleLst>
+      <a:bgFillStyleLst>
+        <a:solidFill>
+          <a:schemeClr val="phClr"/>
+        </a:solidFill>
+        <a:solidFill>
+          <a:schemeClr val="phClr">
+            <a:tint val="95000"/>
+            <a:satMod val="170000"/>
+          </a:schemeClr>
+        </a:solidFill>
+        <a:gradFill rotWithShape="1">
+          <a:gsLst>
+            <a:gs pos="0">
+              <a:schemeClr val="phClr">
+                <a:tint val="93000"/>
+                <a:satMod val="150000"/>
+                <a:shade val="98000"/>
+                <a:lumMod val="102000"/>
+              </a:schemeClr>
+            </a:gs>
+            <a:gs pos="50000">
+              <a:schemeClr val="phClr">
+                <a:tint val="98000"/>
+                <a:satMod val="130000"/>
+                <a:shade val="90000"/>
+                <a:lumMod val="103000"/>
+              </a:schemeClr>
+            </a:gs>
+            <a:gs pos="100000">
+              <a:schemeClr val="phClr">
+                <a:shade val="63000"/>
+                <a:satMod val="120000"/>
+              </a:schemeClr>
+            </a:gs>
+          </a:gsLst>
+          <a:lin ang="5400000" scaled="0"/>
+        </a:gradFill>
+      </a:bgFillStyleLst>
+    </a:fmtScheme>
+  </a:themeElements>
+  <a:objectDefaults/>
+  <a:extraClrSchemeLst/>
+  <a:extLst>
+    <a:ext uri="{05A4C25C-085E-4340-85A3-A5531E510DB2}">
+      <thm15:themeFamily xmlns:thm15="http://schemas.microsoft.com/office/thememl/2012/main" name="Office Theme" id="{62F939B6-93AF-4DB8-9C6B-D6C7DFDC589F}" vid="{4A3C46E8-61CC-4603-A589-7422A47A8E4A}"/>
+    </a:ext>
+  </a:extLst>
+</a:theme>
 </file>